--- a/~sasano/lecture/proglang/26/proglang8Ans.pptx
+++ b/~sasano/lecture/proglang/26/proglang8Ans.pptx
@@ -154,6 +154,22 @@
       </a:defRPr>
     </a:lvl9pPr>
   </p:defaultTextStyle>
+  <p:extLst>
+    <p:ext uri="{EFAFB233-063F-42B5-8137-9DF3F51BA10A}">
+      <p15:sldGuideLst xmlns:p15="http://schemas.microsoft.com/office/powerpoint/2012/main">
+        <p15:guide id="1" orient="horz" pos="2160">
+          <p15:clr>
+            <a:srgbClr val="A4A3A4"/>
+          </p15:clr>
+        </p15:guide>
+        <p15:guide id="2" pos="2880">
+          <p15:clr>
+            <a:srgbClr val="A4A3A4"/>
+          </p15:clr>
+        </p15:guide>
+      </p15:sldGuideLst>
+    </p:ext>
+  </p:extLst>
 </p:presentation>
 </file>
 
@@ -539,14 +555,14 @@
           </a:ln>
           <a:extLst>
             <a:ext uri="{909E8E84-426E-40dd-AFC4-6F175D3DCCD1}">
-              <a14:hiddenFill xmlns:a14="http://schemas.microsoft.com/office/drawing/2010/main">
+              <a14:hiddenFill xmlns:a14="http://schemas.microsoft.com/office/drawing/2010/main" xmlns="">
                 <a:solidFill>
                   <a:srgbClr val="FFFFFF"/>
                 </a:solidFill>
               </a14:hiddenFill>
             </a:ext>
             <a:ext uri="{FAA26D3D-D897-4be2-8F04-BA451C77F1D7}">
-              <ma14:placeholderFlag xmlns:ma14="http://schemas.microsoft.com/office/mac/drawingml/2011/main" val="1"/>
+              <ma14:placeholderFlag xmlns:ma14="http://schemas.microsoft.com/office/mac/drawingml/2011/main" xmlns="" val="1"/>
             </a:ext>
           </a:extLst>
         </p:spPr>
@@ -587,67 +603,67 @@
           <a:p>
             <a:pPr lvl="0"/>
             <a:r>
-              <a:rPr lang="ja-JP" altLang="en-US" noProof="0" smtClean="0"/>
+              <a:rPr lang="ja-JP" altLang="en-US" noProof="0"/>
               <a:t>マスタ テキストの書式設定</a:t>
             </a:r>
           </a:p>
           <a:p>
             <a:pPr lvl="1"/>
             <a:r>
-              <a:rPr lang="ja-JP" altLang="en-US" noProof="0" smtClean="0"/>
+              <a:rPr lang="ja-JP" altLang="en-US" noProof="0"/>
               <a:t>第 </a:t>
             </a:r>
             <a:r>
-              <a:rPr lang="en-US" altLang="ja-JP" noProof="0" smtClean="0"/>
+              <a:rPr lang="en-US" altLang="ja-JP" noProof="0"/>
               <a:t>2 </a:t>
             </a:r>
             <a:r>
-              <a:rPr lang="ja-JP" altLang="en-US" noProof="0" smtClean="0"/>
+              <a:rPr lang="ja-JP" altLang="en-US" noProof="0"/>
               <a:t>レベル</a:t>
             </a:r>
           </a:p>
           <a:p>
             <a:pPr lvl="2"/>
             <a:r>
-              <a:rPr lang="ja-JP" altLang="en-US" noProof="0" smtClean="0"/>
+              <a:rPr lang="ja-JP" altLang="en-US" noProof="0"/>
               <a:t>第 </a:t>
             </a:r>
             <a:r>
-              <a:rPr lang="en-US" altLang="ja-JP" noProof="0" smtClean="0"/>
+              <a:rPr lang="en-US" altLang="ja-JP" noProof="0"/>
               <a:t>3 </a:t>
             </a:r>
             <a:r>
-              <a:rPr lang="ja-JP" altLang="en-US" noProof="0" smtClean="0"/>
+              <a:rPr lang="ja-JP" altLang="en-US" noProof="0"/>
               <a:t>レベル</a:t>
             </a:r>
           </a:p>
           <a:p>
             <a:pPr lvl="3"/>
             <a:r>
-              <a:rPr lang="ja-JP" altLang="en-US" noProof="0" smtClean="0"/>
+              <a:rPr lang="ja-JP" altLang="en-US" noProof="0"/>
               <a:t>第 </a:t>
             </a:r>
             <a:r>
-              <a:rPr lang="en-US" altLang="ja-JP" noProof="0" smtClean="0"/>
+              <a:rPr lang="en-US" altLang="ja-JP" noProof="0"/>
               <a:t>4 </a:t>
             </a:r>
             <a:r>
-              <a:rPr lang="ja-JP" altLang="en-US" noProof="0" smtClean="0"/>
+              <a:rPr lang="ja-JP" altLang="en-US" noProof="0"/>
               <a:t>レベル</a:t>
             </a:r>
           </a:p>
           <a:p>
             <a:pPr lvl="4"/>
             <a:r>
-              <a:rPr lang="ja-JP" altLang="en-US" noProof="0" smtClean="0"/>
+              <a:rPr lang="ja-JP" altLang="en-US" noProof="0"/>
               <a:t>第 </a:t>
             </a:r>
             <a:r>
-              <a:rPr lang="en-US" altLang="ja-JP" noProof="0" smtClean="0"/>
+              <a:rPr lang="en-US" altLang="ja-JP" noProof="0"/>
               <a:t>5 </a:t>
             </a:r>
             <a:r>
-              <a:rPr lang="ja-JP" altLang="en-US" noProof="0" smtClean="0"/>
+              <a:rPr lang="ja-JP" altLang="en-US" noProof="0"/>
               <a:t>レベル</a:t>
             </a:r>
           </a:p>
@@ -918,14 +934,14 @@
           <a:ln/>
           <a:extLst>
             <a:ext uri="{909E8E84-426E-40dd-AFC4-6F175D3DCCD1}">
-              <a14:hiddenFill xmlns:a14="http://schemas.microsoft.com/office/drawing/2010/main">
+              <a14:hiddenFill xmlns:a14="http://schemas.microsoft.com/office/drawing/2010/main" xmlns="">
                 <a:solidFill>
                   <a:srgbClr val="FFFFFF"/>
                 </a:solidFill>
               </a14:hiddenFill>
             </a:ext>
             <a:ext uri="{91240B29-F687-4f45-9708-019B960494DF}">
-              <a14:hiddenLine xmlns:a14="http://schemas.microsoft.com/office/drawing/2010/main" w="9525">
+              <a14:hiddenLine xmlns:a14="http://schemas.microsoft.com/office/drawing/2010/main" xmlns="" w="9525">
                 <a:solidFill>
                   <a:srgbClr val="000000"/>
                 </a:solidFill>
@@ -1085,14 +1101,14 @@
           <a:ln/>
           <a:extLst>
             <a:ext uri="{909E8E84-426E-40dd-AFC4-6F175D3DCCD1}">
-              <a14:hiddenFill xmlns:a14="http://schemas.microsoft.com/office/drawing/2010/main">
+              <a14:hiddenFill xmlns:a14="http://schemas.microsoft.com/office/drawing/2010/main" xmlns="">
                 <a:solidFill>
                   <a:srgbClr val="FFFFFF"/>
                 </a:solidFill>
               </a14:hiddenFill>
             </a:ext>
             <a:ext uri="{91240B29-F687-4f45-9708-019B960494DF}">
-              <a14:hiddenLine xmlns:a14="http://schemas.microsoft.com/office/drawing/2010/main" w="9525">
+              <a14:hiddenLine xmlns:a14="http://schemas.microsoft.com/office/drawing/2010/main" xmlns="" w="9525">
                 <a:solidFill>
                   <a:srgbClr val="000000"/>
                 </a:solidFill>
@@ -1102,7 +1118,7 @@
               </a14:hiddenLine>
             </a:ext>
             <a:ext uri="{FAA26D3D-D897-4be2-8F04-BA451C77F1D7}">
-              <ma14:placeholderFlag xmlns:ma14="http://schemas.microsoft.com/office/mac/drawingml/2011/main" val="1"/>
+              <ma14:placeholderFlag xmlns:ma14="http://schemas.microsoft.com/office/mac/drawingml/2011/main" xmlns="" val="1"/>
             </a:ext>
           </a:extLst>
         </p:spPr>
@@ -1163,10 +1179,9 @@
           <a:lstStyle/>
           <a:p>
             <a:r>
-              <a:rPr lang="ja-JP" altLang="en-US" smtClean="0"/>
+              <a:rPr lang="ja-JP" altLang="en-US"/>
               <a:t>マスタ タイトルの書式設定</a:t>
             </a:r>
-            <a:endParaRPr lang="ja-JP" altLang="en-US"/>
           </a:p>
         </p:txBody>
       </p:sp>
@@ -1228,10 +1243,9 @@
           </a:lstStyle>
           <a:p>
             <a:r>
-              <a:rPr lang="ja-JP" altLang="en-US" smtClean="0"/>
+              <a:rPr lang="ja-JP" altLang="en-US"/>
               <a:t>マスタ サブタイトルの書式設定</a:t>
             </a:r>
-            <a:endParaRPr lang="ja-JP" altLang="en-US"/>
           </a:p>
         </p:txBody>
       </p:sp>
@@ -1372,10 +1386,9 @@
           <a:lstStyle/>
           <a:p>
             <a:r>
-              <a:rPr lang="ja-JP" altLang="en-US" smtClean="0"/>
+              <a:rPr lang="ja-JP" altLang="en-US"/>
               <a:t>マスタ タイトルの書式設定</a:t>
             </a:r>
-            <a:endParaRPr lang="ja-JP" altLang="en-US"/>
           </a:p>
         </p:txBody>
       </p:sp>
@@ -1396,70 +1409,69 @@
           <a:p>
             <a:pPr lvl="0"/>
             <a:r>
-              <a:rPr lang="ja-JP" altLang="en-US" smtClean="0"/>
+              <a:rPr lang="ja-JP" altLang="en-US"/>
               <a:t>マスタ テキストの書式設定</a:t>
             </a:r>
           </a:p>
           <a:p>
             <a:pPr lvl="1"/>
             <a:r>
-              <a:rPr lang="ja-JP" altLang="en-US" smtClean="0"/>
+              <a:rPr lang="ja-JP" altLang="en-US"/>
               <a:t>第 </a:t>
             </a:r>
             <a:r>
-              <a:rPr lang="en-US" altLang="ja-JP" smtClean="0"/>
+              <a:rPr lang="en-US" altLang="ja-JP"/>
               <a:t>2 </a:t>
             </a:r>
             <a:r>
-              <a:rPr lang="ja-JP" altLang="en-US" smtClean="0"/>
+              <a:rPr lang="ja-JP" altLang="en-US"/>
               <a:t>レベル</a:t>
             </a:r>
           </a:p>
           <a:p>
             <a:pPr lvl="2"/>
             <a:r>
-              <a:rPr lang="ja-JP" altLang="en-US" smtClean="0"/>
+              <a:rPr lang="ja-JP" altLang="en-US"/>
               <a:t>第 </a:t>
             </a:r>
             <a:r>
-              <a:rPr lang="en-US" altLang="ja-JP" smtClean="0"/>
+              <a:rPr lang="en-US" altLang="ja-JP"/>
               <a:t>3 </a:t>
             </a:r>
             <a:r>
-              <a:rPr lang="ja-JP" altLang="en-US" smtClean="0"/>
+              <a:rPr lang="ja-JP" altLang="en-US"/>
               <a:t>レベル</a:t>
             </a:r>
           </a:p>
           <a:p>
             <a:pPr lvl="3"/>
             <a:r>
-              <a:rPr lang="ja-JP" altLang="en-US" smtClean="0"/>
+              <a:rPr lang="ja-JP" altLang="en-US"/>
               <a:t>第 </a:t>
             </a:r>
             <a:r>
-              <a:rPr lang="en-US" altLang="ja-JP" smtClean="0"/>
+              <a:rPr lang="en-US" altLang="ja-JP"/>
               <a:t>4 </a:t>
             </a:r>
             <a:r>
-              <a:rPr lang="ja-JP" altLang="en-US" smtClean="0"/>
+              <a:rPr lang="ja-JP" altLang="en-US"/>
               <a:t>レベル</a:t>
             </a:r>
           </a:p>
           <a:p>
             <a:pPr lvl="4"/>
             <a:r>
-              <a:rPr lang="ja-JP" altLang="en-US" smtClean="0"/>
+              <a:rPr lang="ja-JP" altLang="en-US"/>
               <a:t>第 </a:t>
             </a:r>
             <a:r>
-              <a:rPr lang="en-US" altLang="ja-JP" smtClean="0"/>
+              <a:rPr lang="en-US" altLang="ja-JP"/>
               <a:t>5 </a:t>
             </a:r>
             <a:r>
-              <a:rPr lang="ja-JP" altLang="en-US" smtClean="0"/>
+              <a:rPr lang="ja-JP" altLang="en-US"/>
               <a:t>レベル</a:t>
             </a:r>
-            <a:endParaRPr lang="ja-JP" altLang="en-US"/>
           </a:p>
         </p:txBody>
       </p:sp>
@@ -1605,10 +1617,9 @@
           <a:lstStyle/>
           <a:p>
             <a:r>
-              <a:rPr lang="ja-JP" altLang="en-US" smtClean="0"/>
+              <a:rPr lang="ja-JP" altLang="en-US"/>
               <a:t>マスタ タイトルの書式設定</a:t>
             </a:r>
-            <a:endParaRPr lang="ja-JP" altLang="en-US"/>
           </a:p>
         </p:txBody>
       </p:sp>
@@ -1634,70 +1645,69 @@
           <a:p>
             <a:pPr lvl="0"/>
             <a:r>
-              <a:rPr lang="ja-JP" altLang="en-US" smtClean="0"/>
+              <a:rPr lang="ja-JP" altLang="en-US"/>
               <a:t>マスタ テキストの書式設定</a:t>
             </a:r>
           </a:p>
           <a:p>
             <a:pPr lvl="1"/>
             <a:r>
-              <a:rPr lang="ja-JP" altLang="en-US" smtClean="0"/>
+              <a:rPr lang="ja-JP" altLang="en-US"/>
               <a:t>第 </a:t>
             </a:r>
             <a:r>
-              <a:rPr lang="en-US" altLang="ja-JP" smtClean="0"/>
+              <a:rPr lang="en-US" altLang="ja-JP"/>
               <a:t>2 </a:t>
             </a:r>
             <a:r>
-              <a:rPr lang="ja-JP" altLang="en-US" smtClean="0"/>
+              <a:rPr lang="ja-JP" altLang="en-US"/>
               <a:t>レベル</a:t>
             </a:r>
           </a:p>
           <a:p>
             <a:pPr lvl="2"/>
             <a:r>
-              <a:rPr lang="ja-JP" altLang="en-US" smtClean="0"/>
+              <a:rPr lang="ja-JP" altLang="en-US"/>
               <a:t>第 </a:t>
             </a:r>
             <a:r>
-              <a:rPr lang="en-US" altLang="ja-JP" smtClean="0"/>
+              <a:rPr lang="en-US" altLang="ja-JP"/>
               <a:t>3 </a:t>
             </a:r>
             <a:r>
-              <a:rPr lang="ja-JP" altLang="en-US" smtClean="0"/>
+              <a:rPr lang="ja-JP" altLang="en-US"/>
               <a:t>レベル</a:t>
             </a:r>
           </a:p>
           <a:p>
             <a:pPr lvl="3"/>
             <a:r>
-              <a:rPr lang="ja-JP" altLang="en-US" smtClean="0"/>
+              <a:rPr lang="ja-JP" altLang="en-US"/>
               <a:t>第 </a:t>
             </a:r>
             <a:r>
-              <a:rPr lang="en-US" altLang="ja-JP" smtClean="0"/>
+              <a:rPr lang="en-US" altLang="ja-JP"/>
               <a:t>4 </a:t>
             </a:r>
             <a:r>
-              <a:rPr lang="ja-JP" altLang="en-US" smtClean="0"/>
+              <a:rPr lang="ja-JP" altLang="en-US"/>
               <a:t>レベル</a:t>
             </a:r>
           </a:p>
           <a:p>
             <a:pPr lvl="4"/>
             <a:r>
-              <a:rPr lang="ja-JP" altLang="en-US" smtClean="0"/>
+              <a:rPr lang="ja-JP" altLang="en-US"/>
               <a:t>第 </a:t>
             </a:r>
             <a:r>
-              <a:rPr lang="en-US" altLang="ja-JP" smtClean="0"/>
+              <a:rPr lang="en-US" altLang="ja-JP"/>
               <a:t>5 </a:t>
             </a:r>
             <a:r>
-              <a:rPr lang="ja-JP" altLang="en-US" smtClean="0"/>
+              <a:rPr lang="ja-JP" altLang="en-US"/>
               <a:t>レベル</a:t>
             </a:r>
-            <a:endParaRPr lang="ja-JP" altLang="en-US"/>
           </a:p>
         </p:txBody>
       </p:sp>
@@ -1838,10 +1848,9 @@
           <a:lstStyle/>
           <a:p>
             <a:r>
-              <a:rPr lang="ja-JP" altLang="en-US" smtClean="0"/>
+              <a:rPr lang="ja-JP" altLang="en-US"/>
               <a:t>マスタ タイトルの書式設定</a:t>
             </a:r>
-            <a:endParaRPr lang="ja-JP" altLang="en-US"/>
           </a:p>
         </p:txBody>
       </p:sp>
@@ -1862,70 +1871,69 @@
           <a:p>
             <a:pPr lvl="0"/>
             <a:r>
-              <a:rPr lang="ja-JP" altLang="en-US" smtClean="0"/>
+              <a:rPr lang="ja-JP" altLang="en-US"/>
               <a:t>マスタ テキストの書式設定</a:t>
             </a:r>
           </a:p>
           <a:p>
             <a:pPr lvl="1"/>
             <a:r>
-              <a:rPr lang="ja-JP" altLang="en-US" smtClean="0"/>
+              <a:rPr lang="ja-JP" altLang="en-US"/>
               <a:t>第 </a:t>
             </a:r>
             <a:r>
-              <a:rPr lang="en-US" altLang="ja-JP" smtClean="0"/>
+              <a:rPr lang="en-US" altLang="ja-JP"/>
               <a:t>2 </a:t>
             </a:r>
             <a:r>
-              <a:rPr lang="ja-JP" altLang="en-US" smtClean="0"/>
+              <a:rPr lang="ja-JP" altLang="en-US"/>
               <a:t>レベル</a:t>
             </a:r>
           </a:p>
           <a:p>
             <a:pPr lvl="2"/>
             <a:r>
-              <a:rPr lang="ja-JP" altLang="en-US" smtClean="0"/>
+              <a:rPr lang="ja-JP" altLang="en-US"/>
               <a:t>第 </a:t>
             </a:r>
             <a:r>
-              <a:rPr lang="en-US" altLang="ja-JP" smtClean="0"/>
+              <a:rPr lang="en-US" altLang="ja-JP"/>
               <a:t>3 </a:t>
             </a:r>
             <a:r>
-              <a:rPr lang="ja-JP" altLang="en-US" smtClean="0"/>
+              <a:rPr lang="ja-JP" altLang="en-US"/>
               <a:t>レベル</a:t>
             </a:r>
           </a:p>
           <a:p>
             <a:pPr lvl="3"/>
             <a:r>
-              <a:rPr lang="ja-JP" altLang="en-US" smtClean="0"/>
+              <a:rPr lang="ja-JP" altLang="en-US"/>
               <a:t>第 </a:t>
             </a:r>
             <a:r>
-              <a:rPr lang="en-US" altLang="ja-JP" smtClean="0"/>
+              <a:rPr lang="en-US" altLang="ja-JP"/>
               <a:t>4 </a:t>
             </a:r>
             <a:r>
-              <a:rPr lang="ja-JP" altLang="en-US" smtClean="0"/>
+              <a:rPr lang="ja-JP" altLang="en-US"/>
               <a:t>レベル</a:t>
             </a:r>
           </a:p>
           <a:p>
             <a:pPr lvl="4"/>
             <a:r>
-              <a:rPr lang="ja-JP" altLang="en-US" smtClean="0"/>
+              <a:rPr lang="ja-JP" altLang="en-US"/>
               <a:t>第 </a:t>
             </a:r>
             <a:r>
-              <a:rPr lang="en-US" altLang="ja-JP" smtClean="0"/>
+              <a:rPr lang="en-US" altLang="ja-JP"/>
               <a:t>5 </a:t>
             </a:r>
             <a:r>
-              <a:rPr lang="ja-JP" altLang="en-US" smtClean="0"/>
+              <a:rPr lang="ja-JP" altLang="en-US"/>
               <a:t>レベル</a:t>
             </a:r>
-            <a:endParaRPr lang="ja-JP" altLang="en-US"/>
           </a:p>
         </p:txBody>
       </p:sp>
@@ -2075,10 +2083,9 @@
           </a:lstStyle>
           <a:p>
             <a:r>
-              <a:rPr lang="ja-JP" altLang="en-US" smtClean="0"/>
+              <a:rPr lang="ja-JP" altLang="en-US"/>
               <a:t>マスタ タイトルの書式設定</a:t>
             </a:r>
-            <a:endParaRPr lang="ja-JP" altLang="en-US"/>
           </a:p>
         </p:txBody>
       </p:sp>
@@ -2141,7 +2148,7 @@
           <a:p>
             <a:pPr lvl="0"/>
             <a:r>
-              <a:rPr lang="ja-JP" altLang="en-US" smtClean="0"/>
+              <a:rPr lang="ja-JP" altLang="en-US"/>
               <a:t>マスタ テキストの書式設定</a:t>
             </a:r>
           </a:p>
@@ -2284,10 +2291,9 @@
           <a:lstStyle/>
           <a:p>
             <a:r>
-              <a:rPr lang="ja-JP" altLang="en-US" smtClean="0"/>
+              <a:rPr lang="ja-JP" altLang="en-US"/>
               <a:t>マスタ タイトルの書式設定</a:t>
             </a:r>
-            <a:endParaRPr lang="ja-JP" altLang="en-US"/>
           </a:p>
         </p:txBody>
       </p:sp>
@@ -2341,70 +2347,69 @@
           <a:p>
             <a:pPr lvl="0"/>
             <a:r>
-              <a:rPr lang="ja-JP" altLang="en-US" smtClean="0"/>
+              <a:rPr lang="ja-JP" altLang="en-US"/>
               <a:t>マスタ テキストの書式設定</a:t>
             </a:r>
           </a:p>
           <a:p>
             <a:pPr lvl="1"/>
             <a:r>
-              <a:rPr lang="ja-JP" altLang="en-US" smtClean="0"/>
+              <a:rPr lang="ja-JP" altLang="en-US"/>
               <a:t>第 </a:t>
             </a:r>
             <a:r>
-              <a:rPr lang="en-US" altLang="ja-JP" smtClean="0"/>
+              <a:rPr lang="en-US" altLang="ja-JP"/>
               <a:t>2 </a:t>
             </a:r>
             <a:r>
-              <a:rPr lang="ja-JP" altLang="en-US" smtClean="0"/>
+              <a:rPr lang="ja-JP" altLang="en-US"/>
               <a:t>レベル</a:t>
             </a:r>
           </a:p>
           <a:p>
             <a:pPr lvl="2"/>
             <a:r>
-              <a:rPr lang="ja-JP" altLang="en-US" smtClean="0"/>
+              <a:rPr lang="ja-JP" altLang="en-US"/>
               <a:t>第 </a:t>
             </a:r>
             <a:r>
-              <a:rPr lang="en-US" altLang="ja-JP" smtClean="0"/>
+              <a:rPr lang="en-US" altLang="ja-JP"/>
               <a:t>3 </a:t>
             </a:r>
             <a:r>
-              <a:rPr lang="ja-JP" altLang="en-US" smtClean="0"/>
+              <a:rPr lang="ja-JP" altLang="en-US"/>
               <a:t>レベル</a:t>
             </a:r>
           </a:p>
           <a:p>
             <a:pPr lvl="3"/>
             <a:r>
-              <a:rPr lang="ja-JP" altLang="en-US" smtClean="0"/>
+              <a:rPr lang="ja-JP" altLang="en-US"/>
               <a:t>第 </a:t>
             </a:r>
             <a:r>
-              <a:rPr lang="en-US" altLang="ja-JP" smtClean="0"/>
+              <a:rPr lang="en-US" altLang="ja-JP"/>
               <a:t>4 </a:t>
             </a:r>
             <a:r>
-              <a:rPr lang="ja-JP" altLang="en-US" smtClean="0"/>
+              <a:rPr lang="ja-JP" altLang="en-US"/>
               <a:t>レベル</a:t>
             </a:r>
           </a:p>
           <a:p>
             <a:pPr lvl="4"/>
             <a:r>
-              <a:rPr lang="ja-JP" altLang="en-US" smtClean="0"/>
+              <a:rPr lang="ja-JP" altLang="en-US"/>
               <a:t>第 </a:t>
             </a:r>
             <a:r>
-              <a:rPr lang="en-US" altLang="ja-JP" smtClean="0"/>
+              <a:rPr lang="en-US" altLang="ja-JP"/>
               <a:t>5 </a:t>
             </a:r>
             <a:r>
-              <a:rPr lang="ja-JP" altLang="en-US" smtClean="0"/>
+              <a:rPr lang="ja-JP" altLang="en-US"/>
               <a:t>レベル</a:t>
             </a:r>
-            <a:endParaRPr lang="ja-JP" altLang="en-US"/>
           </a:p>
         </p:txBody>
       </p:sp>
@@ -2458,70 +2463,69 @@
           <a:p>
             <a:pPr lvl="0"/>
             <a:r>
-              <a:rPr lang="ja-JP" altLang="en-US" smtClean="0"/>
+              <a:rPr lang="ja-JP" altLang="en-US"/>
               <a:t>マスタ テキストの書式設定</a:t>
             </a:r>
           </a:p>
           <a:p>
             <a:pPr lvl="1"/>
             <a:r>
-              <a:rPr lang="ja-JP" altLang="en-US" smtClean="0"/>
+              <a:rPr lang="ja-JP" altLang="en-US"/>
               <a:t>第 </a:t>
             </a:r>
             <a:r>
-              <a:rPr lang="en-US" altLang="ja-JP" smtClean="0"/>
+              <a:rPr lang="en-US" altLang="ja-JP"/>
               <a:t>2 </a:t>
             </a:r>
             <a:r>
-              <a:rPr lang="ja-JP" altLang="en-US" smtClean="0"/>
+              <a:rPr lang="ja-JP" altLang="en-US"/>
               <a:t>レベル</a:t>
             </a:r>
           </a:p>
           <a:p>
             <a:pPr lvl="2"/>
             <a:r>
-              <a:rPr lang="ja-JP" altLang="en-US" smtClean="0"/>
+              <a:rPr lang="ja-JP" altLang="en-US"/>
               <a:t>第 </a:t>
             </a:r>
             <a:r>
-              <a:rPr lang="en-US" altLang="ja-JP" smtClean="0"/>
+              <a:rPr lang="en-US" altLang="ja-JP"/>
               <a:t>3 </a:t>
             </a:r>
             <a:r>
-              <a:rPr lang="ja-JP" altLang="en-US" smtClean="0"/>
+              <a:rPr lang="ja-JP" altLang="en-US"/>
               <a:t>レベル</a:t>
             </a:r>
           </a:p>
           <a:p>
             <a:pPr lvl="3"/>
             <a:r>
-              <a:rPr lang="ja-JP" altLang="en-US" smtClean="0"/>
+              <a:rPr lang="ja-JP" altLang="en-US"/>
               <a:t>第 </a:t>
             </a:r>
             <a:r>
-              <a:rPr lang="en-US" altLang="ja-JP" smtClean="0"/>
+              <a:rPr lang="en-US" altLang="ja-JP"/>
               <a:t>4 </a:t>
             </a:r>
             <a:r>
-              <a:rPr lang="ja-JP" altLang="en-US" smtClean="0"/>
+              <a:rPr lang="ja-JP" altLang="en-US"/>
               <a:t>レベル</a:t>
             </a:r>
           </a:p>
           <a:p>
             <a:pPr lvl="4"/>
             <a:r>
-              <a:rPr lang="ja-JP" altLang="en-US" smtClean="0"/>
+              <a:rPr lang="ja-JP" altLang="en-US"/>
               <a:t>第 </a:t>
             </a:r>
             <a:r>
-              <a:rPr lang="en-US" altLang="ja-JP" smtClean="0"/>
+              <a:rPr lang="en-US" altLang="ja-JP"/>
               <a:t>5 </a:t>
             </a:r>
             <a:r>
-              <a:rPr lang="ja-JP" altLang="en-US" smtClean="0"/>
+              <a:rPr lang="ja-JP" altLang="en-US"/>
               <a:t>レベル</a:t>
             </a:r>
-            <a:endParaRPr lang="ja-JP" altLang="en-US"/>
           </a:p>
         </p:txBody>
       </p:sp>
@@ -2671,10 +2675,9 @@
           </a:lstStyle>
           <a:p>
             <a:r>
-              <a:rPr lang="ja-JP" altLang="en-US" smtClean="0"/>
+              <a:rPr lang="ja-JP" altLang="en-US"/>
               <a:t>マスタ タイトルの書式設定</a:t>
             </a:r>
-            <a:endParaRPr lang="ja-JP" altLang="en-US"/>
           </a:p>
         </p:txBody>
       </p:sp>
@@ -2737,7 +2740,7 @@
           <a:p>
             <a:pPr lvl="0"/>
             <a:r>
-              <a:rPr lang="ja-JP" altLang="en-US" smtClean="0"/>
+              <a:rPr lang="ja-JP" altLang="en-US"/>
               <a:t>マスタ テキストの書式設定</a:t>
             </a:r>
           </a:p>
@@ -2793,70 +2796,69 @@
           <a:p>
             <a:pPr lvl="0"/>
             <a:r>
-              <a:rPr lang="ja-JP" altLang="en-US" smtClean="0"/>
+              <a:rPr lang="ja-JP" altLang="en-US"/>
               <a:t>マスタ テキストの書式設定</a:t>
             </a:r>
           </a:p>
           <a:p>
             <a:pPr lvl="1"/>
             <a:r>
-              <a:rPr lang="ja-JP" altLang="en-US" smtClean="0"/>
+              <a:rPr lang="ja-JP" altLang="en-US"/>
               <a:t>第 </a:t>
             </a:r>
             <a:r>
-              <a:rPr lang="en-US" altLang="ja-JP" smtClean="0"/>
+              <a:rPr lang="en-US" altLang="ja-JP"/>
               <a:t>2 </a:t>
             </a:r>
             <a:r>
-              <a:rPr lang="ja-JP" altLang="en-US" smtClean="0"/>
+              <a:rPr lang="ja-JP" altLang="en-US"/>
               <a:t>レベル</a:t>
             </a:r>
           </a:p>
           <a:p>
             <a:pPr lvl="2"/>
             <a:r>
-              <a:rPr lang="ja-JP" altLang="en-US" smtClean="0"/>
+              <a:rPr lang="ja-JP" altLang="en-US"/>
               <a:t>第 </a:t>
             </a:r>
             <a:r>
-              <a:rPr lang="en-US" altLang="ja-JP" smtClean="0"/>
+              <a:rPr lang="en-US" altLang="ja-JP"/>
               <a:t>3 </a:t>
             </a:r>
             <a:r>
-              <a:rPr lang="ja-JP" altLang="en-US" smtClean="0"/>
+              <a:rPr lang="ja-JP" altLang="en-US"/>
               <a:t>レベル</a:t>
             </a:r>
           </a:p>
           <a:p>
             <a:pPr lvl="3"/>
             <a:r>
-              <a:rPr lang="ja-JP" altLang="en-US" smtClean="0"/>
+              <a:rPr lang="ja-JP" altLang="en-US"/>
               <a:t>第 </a:t>
             </a:r>
             <a:r>
-              <a:rPr lang="en-US" altLang="ja-JP" smtClean="0"/>
+              <a:rPr lang="en-US" altLang="ja-JP"/>
               <a:t>4 </a:t>
             </a:r>
             <a:r>
-              <a:rPr lang="ja-JP" altLang="en-US" smtClean="0"/>
+              <a:rPr lang="ja-JP" altLang="en-US"/>
               <a:t>レベル</a:t>
             </a:r>
           </a:p>
           <a:p>
             <a:pPr lvl="4"/>
             <a:r>
-              <a:rPr lang="ja-JP" altLang="en-US" smtClean="0"/>
+              <a:rPr lang="ja-JP" altLang="en-US"/>
               <a:t>第 </a:t>
             </a:r>
             <a:r>
-              <a:rPr lang="en-US" altLang="ja-JP" smtClean="0"/>
+              <a:rPr lang="en-US" altLang="ja-JP"/>
               <a:t>5 </a:t>
             </a:r>
             <a:r>
-              <a:rPr lang="ja-JP" altLang="en-US" smtClean="0"/>
+              <a:rPr lang="ja-JP" altLang="en-US"/>
               <a:t>レベル</a:t>
             </a:r>
-            <a:endParaRPr lang="ja-JP" altLang="en-US"/>
           </a:p>
         </p:txBody>
       </p:sp>
@@ -2919,7 +2921,7 @@
           <a:p>
             <a:pPr lvl="0"/>
             <a:r>
-              <a:rPr lang="ja-JP" altLang="en-US" smtClean="0"/>
+              <a:rPr lang="ja-JP" altLang="en-US"/>
               <a:t>マスタ テキストの書式設定</a:t>
             </a:r>
           </a:p>
@@ -2975,70 +2977,69 @@
           <a:p>
             <a:pPr lvl="0"/>
             <a:r>
-              <a:rPr lang="ja-JP" altLang="en-US" smtClean="0"/>
+              <a:rPr lang="ja-JP" altLang="en-US"/>
               <a:t>マスタ テキストの書式設定</a:t>
             </a:r>
           </a:p>
           <a:p>
             <a:pPr lvl="1"/>
             <a:r>
-              <a:rPr lang="ja-JP" altLang="en-US" smtClean="0"/>
+              <a:rPr lang="ja-JP" altLang="en-US"/>
               <a:t>第 </a:t>
             </a:r>
             <a:r>
-              <a:rPr lang="en-US" altLang="ja-JP" smtClean="0"/>
+              <a:rPr lang="en-US" altLang="ja-JP"/>
               <a:t>2 </a:t>
             </a:r>
             <a:r>
-              <a:rPr lang="ja-JP" altLang="en-US" smtClean="0"/>
+              <a:rPr lang="ja-JP" altLang="en-US"/>
               <a:t>レベル</a:t>
             </a:r>
           </a:p>
           <a:p>
             <a:pPr lvl="2"/>
             <a:r>
-              <a:rPr lang="ja-JP" altLang="en-US" smtClean="0"/>
+              <a:rPr lang="ja-JP" altLang="en-US"/>
               <a:t>第 </a:t>
             </a:r>
             <a:r>
-              <a:rPr lang="en-US" altLang="ja-JP" smtClean="0"/>
+              <a:rPr lang="en-US" altLang="ja-JP"/>
               <a:t>3 </a:t>
             </a:r>
             <a:r>
-              <a:rPr lang="ja-JP" altLang="en-US" smtClean="0"/>
+              <a:rPr lang="ja-JP" altLang="en-US"/>
               <a:t>レベル</a:t>
             </a:r>
           </a:p>
           <a:p>
             <a:pPr lvl="3"/>
             <a:r>
-              <a:rPr lang="ja-JP" altLang="en-US" smtClean="0"/>
+              <a:rPr lang="ja-JP" altLang="en-US"/>
               <a:t>第 </a:t>
             </a:r>
             <a:r>
-              <a:rPr lang="en-US" altLang="ja-JP" smtClean="0"/>
+              <a:rPr lang="en-US" altLang="ja-JP"/>
               <a:t>4 </a:t>
             </a:r>
             <a:r>
-              <a:rPr lang="ja-JP" altLang="en-US" smtClean="0"/>
+              <a:rPr lang="ja-JP" altLang="en-US"/>
               <a:t>レベル</a:t>
             </a:r>
           </a:p>
           <a:p>
             <a:pPr lvl="4"/>
             <a:r>
-              <a:rPr lang="ja-JP" altLang="en-US" smtClean="0"/>
+              <a:rPr lang="ja-JP" altLang="en-US"/>
               <a:t>第 </a:t>
             </a:r>
             <a:r>
-              <a:rPr lang="en-US" altLang="ja-JP" smtClean="0"/>
+              <a:rPr lang="en-US" altLang="ja-JP"/>
               <a:t>5 </a:t>
             </a:r>
             <a:r>
-              <a:rPr lang="ja-JP" altLang="en-US" smtClean="0"/>
+              <a:rPr lang="ja-JP" altLang="en-US"/>
               <a:t>レベル</a:t>
             </a:r>
-            <a:endParaRPr lang="ja-JP" altLang="en-US"/>
           </a:p>
         </p:txBody>
       </p:sp>
@@ -3179,10 +3180,9 @@
           <a:lstStyle/>
           <a:p>
             <a:r>
-              <a:rPr lang="ja-JP" altLang="en-US" smtClean="0"/>
+              <a:rPr lang="ja-JP" altLang="en-US"/>
               <a:t>マスタ タイトルの書式設定</a:t>
             </a:r>
-            <a:endParaRPr lang="ja-JP" altLang="en-US"/>
           </a:p>
         </p:txBody>
       </p:sp>
@@ -3453,10 +3453,9 @@
           </a:lstStyle>
           <a:p>
             <a:r>
-              <a:rPr lang="ja-JP" altLang="en-US" smtClean="0"/>
+              <a:rPr lang="ja-JP" altLang="en-US"/>
               <a:t>マスタ タイトルの書式設定</a:t>
             </a:r>
-            <a:endParaRPr lang="ja-JP" altLang="en-US"/>
           </a:p>
         </p:txBody>
       </p:sp>
@@ -3510,70 +3509,69 @@
           <a:p>
             <a:pPr lvl="0"/>
             <a:r>
-              <a:rPr lang="ja-JP" altLang="en-US" smtClean="0"/>
+              <a:rPr lang="ja-JP" altLang="en-US"/>
               <a:t>マスタ テキストの書式設定</a:t>
             </a:r>
           </a:p>
           <a:p>
             <a:pPr lvl="1"/>
             <a:r>
-              <a:rPr lang="ja-JP" altLang="en-US" smtClean="0"/>
+              <a:rPr lang="ja-JP" altLang="en-US"/>
               <a:t>第 </a:t>
             </a:r>
             <a:r>
-              <a:rPr lang="en-US" altLang="ja-JP" smtClean="0"/>
+              <a:rPr lang="en-US" altLang="ja-JP"/>
               <a:t>2 </a:t>
             </a:r>
             <a:r>
-              <a:rPr lang="ja-JP" altLang="en-US" smtClean="0"/>
+              <a:rPr lang="ja-JP" altLang="en-US"/>
               <a:t>レベル</a:t>
             </a:r>
           </a:p>
           <a:p>
             <a:pPr lvl="2"/>
             <a:r>
-              <a:rPr lang="ja-JP" altLang="en-US" smtClean="0"/>
+              <a:rPr lang="ja-JP" altLang="en-US"/>
               <a:t>第 </a:t>
             </a:r>
             <a:r>
-              <a:rPr lang="en-US" altLang="ja-JP" smtClean="0"/>
+              <a:rPr lang="en-US" altLang="ja-JP"/>
               <a:t>3 </a:t>
             </a:r>
             <a:r>
-              <a:rPr lang="ja-JP" altLang="en-US" smtClean="0"/>
+              <a:rPr lang="ja-JP" altLang="en-US"/>
               <a:t>レベル</a:t>
             </a:r>
           </a:p>
           <a:p>
             <a:pPr lvl="3"/>
             <a:r>
-              <a:rPr lang="ja-JP" altLang="en-US" smtClean="0"/>
+              <a:rPr lang="ja-JP" altLang="en-US"/>
               <a:t>第 </a:t>
             </a:r>
             <a:r>
-              <a:rPr lang="en-US" altLang="ja-JP" smtClean="0"/>
+              <a:rPr lang="en-US" altLang="ja-JP"/>
               <a:t>4 </a:t>
             </a:r>
             <a:r>
-              <a:rPr lang="ja-JP" altLang="en-US" smtClean="0"/>
+              <a:rPr lang="ja-JP" altLang="en-US"/>
               <a:t>レベル</a:t>
             </a:r>
           </a:p>
           <a:p>
             <a:pPr lvl="4"/>
             <a:r>
-              <a:rPr lang="ja-JP" altLang="en-US" smtClean="0"/>
+              <a:rPr lang="ja-JP" altLang="en-US"/>
               <a:t>第 </a:t>
             </a:r>
             <a:r>
-              <a:rPr lang="en-US" altLang="ja-JP" smtClean="0"/>
+              <a:rPr lang="en-US" altLang="ja-JP"/>
               <a:t>5 </a:t>
             </a:r>
             <a:r>
-              <a:rPr lang="ja-JP" altLang="en-US" smtClean="0"/>
+              <a:rPr lang="ja-JP" altLang="en-US"/>
               <a:t>レベル</a:t>
             </a:r>
-            <a:endParaRPr lang="ja-JP" altLang="en-US"/>
           </a:p>
         </p:txBody>
       </p:sp>
@@ -3636,7 +3634,7 @@
           <a:p>
             <a:pPr lvl="0"/>
             <a:r>
-              <a:rPr lang="ja-JP" altLang="en-US" smtClean="0"/>
+              <a:rPr lang="ja-JP" altLang="en-US"/>
               <a:t>マスタ テキストの書式設定</a:t>
             </a:r>
           </a:p>
@@ -3788,10 +3786,9 @@
           </a:lstStyle>
           <a:p>
             <a:r>
-              <a:rPr lang="ja-JP" altLang="en-US" smtClean="0"/>
+              <a:rPr lang="ja-JP" altLang="en-US"/>
               <a:t>マスタ タイトルの書式設定</a:t>
             </a:r>
-            <a:endParaRPr lang="ja-JP" altLang="en-US"/>
           </a:p>
         </p:txBody>
       </p:sp>
@@ -3853,7 +3850,7 @@
           </a:lstStyle>
           <a:p>
             <a:pPr lvl="0"/>
-            <a:endParaRPr lang="ja-JP" altLang="en-US" noProof="0" smtClean="0"/>
+            <a:endParaRPr lang="ja-JP" altLang="en-US" noProof="0"/>
           </a:p>
         </p:txBody>
       </p:sp>
@@ -3916,7 +3913,7 @@
           <a:p>
             <a:pPr lvl="0"/>
             <a:r>
-              <a:rPr lang="ja-JP" altLang="en-US" smtClean="0"/>
+              <a:rPr lang="ja-JP" altLang="en-US"/>
               <a:t>マスタ テキストの書式設定</a:t>
             </a:r>
           </a:p>
@@ -4075,14 +4072,14 @@
           </a:ln>
           <a:extLst>
             <a:ext uri="{909E8E84-426E-40dd-AFC4-6F175D3DCCD1}">
-              <a14:hiddenFill xmlns:a14="http://schemas.microsoft.com/office/drawing/2010/main">
+              <a14:hiddenFill xmlns:a14="http://schemas.microsoft.com/office/drawing/2010/main" xmlns="">
                 <a:solidFill>
                   <a:srgbClr val="FFFFFF"/>
                 </a:solidFill>
               </a14:hiddenFill>
             </a:ext>
             <a:ext uri="{91240B29-F687-4f45-9708-019B960494DF}">
-              <a14:hiddenLine xmlns:a14="http://schemas.microsoft.com/office/drawing/2010/main" w="9525">
+              <a14:hiddenLine xmlns:a14="http://schemas.microsoft.com/office/drawing/2010/main" xmlns="" w="9525">
                 <a:solidFill>
                   <a:srgbClr val="000000"/>
                 </a:solidFill>
@@ -4092,7 +4089,7 @@
               </a14:hiddenLine>
             </a:ext>
             <a:ext uri="{FAA26D3D-D897-4be2-8F04-BA451C77F1D7}">
-              <ma14:placeholderFlag xmlns:ma14="http://schemas.microsoft.com/office/mac/drawingml/2011/main" val="1"/>
+              <ma14:placeholderFlag xmlns:ma14="http://schemas.microsoft.com/office/mac/drawingml/2011/main" xmlns="" val="1"/>
             </a:ext>
           </a:extLst>
         </p:spPr>
@@ -4136,14 +4133,14 @@
           </a:ln>
           <a:extLst>
             <a:ext uri="{909E8E84-426E-40dd-AFC4-6F175D3DCCD1}">
-              <a14:hiddenFill xmlns:a14="http://schemas.microsoft.com/office/drawing/2010/main">
+              <a14:hiddenFill xmlns:a14="http://schemas.microsoft.com/office/drawing/2010/main" xmlns="">
                 <a:solidFill>
                   <a:srgbClr val="FFFFFF"/>
                 </a:solidFill>
               </a14:hiddenFill>
             </a:ext>
             <a:ext uri="{91240B29-F687-4f45-9708-019B960494DF}">
-              <a14:hiddenLine xmlns:a14="http://schemas.microsoft.com/office/drawing/2010/main" w="9525">
+              <a14:hiddenLine xmlns:a14="http://schemas.microsoft.com/office/drawing/2010/main" xmlns="" w="9525">
                 <a:solidFill>
                   <a:srgbClr val="000000"/>
                 </a:solidFill>
@@ -4153,7 +4150,7 @@
               </a14:hiddenLine>
             </a:ext>
             <a:ext uri="{FAA26D3D-D897-4be2-8F04-BA451C77F1D7}">
-              <ma14:placeholderFlag xmlns:ma14="http://schemas.microsoft.com/office/mac/drawingml/2011/main" val="1"/>
+              <ma14:placeholderFlag xmlns:ma14="http://schemas.microsoft.com/office/mac/drawingml/2011/main" xmlns="" val="1"/>
             </a:ext>
           </a:extLst>
         </p:spPr>
@@ -4850,7 +4847,7 @@
         </p:nvSpPr>
         <p:spPr>
           <a:xfrm>
-            <a:off x="1643063" y="4786313"/>
+            <a:off x="1785937" y="4941168"/>
             <a:ext cx="5715000" cy="642937"/>
           </a:xfrm>
         </p:spPr>
@@ -4864,7 +4861,7 @@
                 <a:latin typeface="Arial" charset="0"/>
                 <a:ea typeface="ＭＳ Ｐゴシック" charset="0"/>
               </a:rPr>
-              <a:t>情報工学科　篠埜　功</a:t>
+              <a:t>篠埜　功</a:t>
             </a:r>
           </a:p>
         </p:txBody>
@@ -4891,14 +4888,14 @@
           </a:ln>
           <a:extLst>
             <a:ext uri="{909E8E84-426E-40dd-AFC4-6F175D3DCCD1}">
-              <a14:hiddenFill xmlns:a14="http://schemas.microsoft.com/office/drawing/2010/main">
+              <a14:hiddenFill xmlns:a14="http://schemas.microsoft.com/office/drawing/2010/main" xmlns="">
                 <a:solidFill>
                   <a:srgbClr val="FFFFFF"/>
                 </a:solidFill>
               </a14:hiddenFill>
             </a:ext>
             <a:ext uri="{91240B29-F687-4f45-9708-019B960494DF}">
-              <a14:hiddenLine xmlns:a14="http://schemas.microsoft.com/office/drawing/2010/main" w="9525">
+              <a14:hiddenLine xmlns:a14="http://schemas.microsoft.com/office/drawing/2010/main" xmlns="" w="9525">
                 <a:solidFill>
                   <a:srgbClr val="000000"/>
                 </a:solidFill>
@@ -4917,20 +4914,16 @@
           <a:p>
             <a:pPr algn="ctr"/>
             <a:r>
-              <a:rPr lang="ja-JP" altLang="en-US" sz="3200" b="0" dirty="0" smtClean="0"/>
+              <a:rPr lang="ja-JP" altLang="en-US" sz="3200" b="0" dirty="0"/>
               <a:t>第</a:t>
             </a:r>
             <a:r>
-              <a:rPr lang="en-US" altLang="ja-JP" sz="3200" b="0" dirty="0" smtClean="0"/>
+              <a:rPr lang="en-US" altLang="ja-JP" sz="3200" b="0" dirty="0"/>
               <a:t>8</a:t>
             </a:r>
             <a:r>
-              <a:rPr lang="ja-JP" altLang="en-US" sz="3200" b="0" dirty="0" smtClean="0"/>
-              <a:t>回</a:t>
-            </a:r>
-            <a:r>
               <a:rPr lang="ja-JP" altLang="en-US" sz="3200" b="0" dirty="0"/>
-              <a:t>　型について</a:t>
+              <a:t>回　型について</a:t>
             </a:r>
             <a:endParaRPr lang="en-US" altLang="ja-JP" sz="3200" b="0" dirty="0"/>
           </a:p>
@@ -4949,13 +4942,6 @@
   <p:clrMapOvr>
     <a:masterClrMapping/>
   </p:clrMapOvr>
-  <p:timing>
-    <p:tnLst>
-      <p:par>
-        <p:cTn xmlns:p14="http://schemas.microsoft.com/office/powerpoint/2010/main" id="1" dur="indefinite" restart="never" nodeType="tmRoot"/>
-      </p:par>
-    </p:tnLst>
-  </p:timing>
 </p:sld>
 </file>
 
@@ -5001,17 +4987,10 @@
                 <a:latin typeface="Arial" charset="0"/>
                 <a:ea typeface="ＭＳ Ｐゴシック" charset="0"/>
               </a:rPr>
-              <a:t>練習</a:t>
-            </a:r>
-            <a:r>
-              <a:rPr lang="ja-JP" altLang="en-US" dirty="0" smtClean="0">
-                <a:latin typeface="Arial" charset="0"/>
-                <a:ea typeface="ＭＳ Ｐゴシック" charset="0"/>
-              </a:rPr>
-              <a:t>問題</a:t>
-            </a:r>
-            <a:r>
-              <a:rPr lang="en-US" altLang="ja-JP" dirty="0" smtClean="0">
+              <a:t>練習問題</a:t>
+            </a:r>
+            <a:r>
+              <a:rPr lang="en-US" altLang="ja-JP" dirty="0">
                 <a:latin typeface="Arial" charset="0"/>
                 <a:ea typeface="ＭＳ Ｐゴシック" charset="0"/>
               </a:rPr>
@@ -5049,21 +5028,21 @@
               <a:buNone/>
             </a:pPr>
             <a:r>
-              <a:rPr lang="en-US" altLang="ja-JP" sz="2800" dirty="0" smtClean="0">
+              <a:rPr lang="en-US" altLang="ja-JP" sz="2800" dirty="0">
                 <a:latin typeface="Arial" charset="0"/>
                 <a:ea typeface="ＭＳ Ｐゴシック" charset="0"/>
               </a:rPr>
               <a:t>C</a:t>
             </a:r>
             <a:r>
-              <a:rPr lang="ja-JP" altLang="en-US" sz="2800" dirty="0" smtClean="0">
+              <a:rPr lang="ja-JP" altLang="en-US" sz="2800" dirty="0">
                 <a:latin typeface="Arial" charset="0"/>
                 <a:ea typeface="ＭＳ Ｐゴシック" charset="0"/>
               </a:rPr>
               <a:t>言語の変数宣言</a:t>
             </a:r>
             <a:r>
-              <a:rPr lang="en-US" altLang="ja-JP" sz="2800" dirty="0" smtClean="0">
+              <a:rPr lang="en-US" altLang="ja-JP" sz="2800" dirty="0">
                 <a:latin typeface="Arial" charset="0"/>
                 <a:ea typeface="ＭＳ Ｐゴシック" charset="0"/>
               </a:rPr>
@@ -5076,32 +5055,25 @@
               <a:buNone/>
             </a:pPr>
             <a:r>
-              <a:rPr lang="en-US" altLang="ja-JP" sz="2800" dirty="0" smtClean="0">
+              <a:rPr lang="en-US" altLang="ja-JP" sz="2800" dirty="0">
                 <a:latin typeface="Arial" charset="0"/>
                 <a:ea typeface="ＭＳ Ｐゴシック" charset="0"/>
               </a:rPr>
               <a:t>    </a:t>
             </a:r>
             <a:r>
-              <a:rPr lang="en-US" altLang="ja-JP" sz="2800" dirty="0" err="1" smtClean="0">
+              <a:rPr lang="en-US" altLang="ja-JP" sz="2800" dirty="0" err="1">
                 <a:latin typeface="Arial" charset="0"/>
                 <a:ea typeface="ＭＳ Ｐゴシック" charset="0"/>
               </a:rPr>
               <a:t>int</a:t>
             </a:r>
             <a:r>
-              <a:rPr lang="en-US" altLang="ja-JP" sz="2800" dirty="0" smtClean="0">
-                <a:latin typeface="Arial" charset="0"/>
-                <a:ea typeface="ＭＳ Ｐゴシック" charset="0"/>
-              </a:rPr>
-              <a:t>  </a:t>
-            </a:r>
-            <a:r>
               <a:rPr lang="en-US" altLang="ja-JP" sz="2800" dirty="0">
                 <a:latin typeface="Arial" charset="0"/>
                 <a:ea typeface="ＭＳ Ｐゴシック" charset="0"/>
               </a:rPr>
-              <a:t>b [2] [13] ;</a:t>
+              <a:t>  b [2] [13] ;</a:t>
             </a:r>
           </a:p>
           <a:p>
@@ -5110,25 +5082,11 @@
               <a:buNone/>
             </a:pPr>
             <a:r>
-              <a:rPr lang="ja-JP" altLang="en-US" sz="2800" dirty="0" smtClean="0">
-                <a:latin typeface="Arial" charset="0"/>
-                <a:ea typeface="ＭＳ Ｐゴシック" charset="0"/>
-              </a:rPr>
-              <a:t>のもと</a:t>
-            </a:r>
-            <a:r>
               <a:rPr lang="ja-JP" altLang="en-US" sz="2800" dirty="0">
                 <a:latin typeface="Arial" charset="0"/>
                 <a:ea typeface="ＭＳ Ｐゴシック" charset="0"/>
               </a:rPr>
-              <a:t>で</a:t>
-            </a:r>
-            <a:r>
-              <a:rPr lang="ja-JP" altLang="en-US" sz="2800" dirty="0" smtClean="0">
-                <a:latin typeface="Arial" charset="0"/>
-                <a:ea typeface="ＭＳ Ｐゴシック" charset="0"/>
-              </a:rPr>
-              <a:t>、式  </a:t>
+              <a:t>のもとで、式  </a:t>
             </a:r>
             <a:r>
               <a:rPr lang="en-US" altLang="ja-JP" sz="2800" dirty="0">
@@ -5142,42 +5100,21 @@
                 <a:latin typeface="Arial" charset="0"/>
                 <a:ea typeface="ＭＳ Ｐゴシック" charset="0"/>
               </a:rPr>
-              <a:t>の</a:t>
-            </a:r>
-            <a:r>
-              <a:rPr lang="ja-JP" altLang="en-US" sz="2800" dirty="0" smtClean="0">
-                <a:latin typeface="Arial" charset="0"/>
-                <a:ea typeface="ＭＳ Ｐゴシック" charset="0"/>
-              </a:rPr>
-              <a:t>型を、変数</a:t>
-            </a:r>
-            <a:r>
-              <a:rPr lang="en-US" altLang="ja-JP" sz="2800" dirty="0" smtClean="0">
+              <a:t>の型を、変数</a:t>
+            </a:r>
+            <a:r>
+              <a:rPr lang="en-US" altLang="ja-JP" sz="2800" dirty="0">
                 <a:latin typeface="Arial" charset="0"/>
                 <a:ea typeface="ＭＳ Ｐゴシック" charset="0"/>
               </a:rPr>
               <a:t>b</a:t>
             </a:r>
             <a:r>
-              <a:rPr lang="ja-JP" altLang="en-US" sz="2800" dirty="0" smtClean="0">
-                <a:latin typeface="Arial" charset="0"/>
-                <a:ea typeface="ＭＳ Ｐゴシック" charset="0"/>
-              </a:rPr>
-              <a:t>の型の後置記法による宣言</a:t>
-            </a:r>
-            <a:r>
               <a:rPr lang="ja-JP" altLang="en-US" sz="2800" dirty="0">
                 <a:latin typeface="Arial" charset="0"/>
                 <a:ea typeface="ＭＳ Ｐゴシック" charset="0"/>
               </a:rPr>
-              <a:t>から推論規則で</a:t>
-            </a:r>
-            <a:r>
-              <a:rPr lang="ja-JP" altLang="en-US" sz="2800" dirty="0" smtClean="0">
-                <a:latin typeface="Arial" charset="0"/>
-                <a:ea typeface="ＭＳ Ｐゴシック" charset="0"/>
-              </a:rPr>
-              <a:t>導け。</a:t>
+              <a:t>の型の後置記法による宣言から推論規則で導け。</a:t>
             </a:r>
             <a:endParaRPr lang="en-US" altLang="ja-JP" sz="2800" dirty="0">
               <a:latin typeface="Arial" charset="0"/>
@@ -5271,62 +5208,11 @@
               <a:buNone/>
             </a:pPr>
             <a:r>
-              <a:rPr lang="ja-JP" altLang="en-US" sz="2800" dirty="0" smtClean="0">
+              <a:rPr lang="ja-JP" altLang="en-US" sz="2800" dirty="0">
                 <a:latin typeface="Arial" charset="0"/>
                 <a:ea typeface="ＭＳ Ｐゴシック" charset="0"/>
               </a:rPr>
               <a:t>まず、</a:t>
-            </a:r>
-            <a:endParaRPr lang="en-US" altLang="ja-JP" sz="2800" dirty="0" smtClean="0">
-              <a:latin typeface="Arial" charset="0"/>
-              <a:ea typeface="ＭＳ Ｐゴシック" charset="0"/>
-            </a:endParaRPr>
-          </a:p>
-          <a:p>
-            <a:pPr>
-              <a:buFontTx/>
-              <a:buNone/>
-            </a:pPr>
-            <a:r>
-              <a:rPr lang="en-US" altLang="ja-JP" sz="2800" dirty="0" smtClean="0">
-                <a:latin typeface="Arial" charset="0"/>
-                <a:ea typeface="ＭＳ Ｐゴシック" charset="0"/>
-              </a:rPr>
-              <a:t>    </a:t>
-            </a:r>
-            <a:r>
-              <a:rPr lang="en-US" altLang="ja-JP" sz="2800" dirty="0" err="1">
-                <a:latin typeface="Arial" charset="0"/>
-                <a:ea typeface="ＭＳ Ｐゴシック" charset="0"/>
-              </a:rPr>
-              <a:t>int</a:t>
-            </a:r>
-            <a:r>
-              <a:rPr lang="en-US" altLang="ja-JP" sz="2800" dirty="0">
-                <a:latin typeface="Arial" charset="0"/>
-                <a:ea typeface="ＭＳ Ｐゴシック" charset="0"/>
-              </a:rPr>
-              <a:t>  b [2] [13] ;</a:t>
-            </a:r>
-          </a:p>
-          <a:p>
-            <a:pPr>
-              <a:buFontTx/>
-              <a:buNone/>
-            </a:pPr>
-            <a:r>
-              <a:rPr lang="ja-JP" altLang="en-US" sz="2800" dirty="0" smtClean="0">
-                <a:latin typeface="Arial" charset="0"/>
-                <a:ea typeface="ＭＳ Ｐゴシック" charset="0"/>
-              </a:rPr>
-              <a:t>を後置記法</a:t>
-            </a:r>
-            <a:r>
-              <a:rPr lang="ja-JP" altLang="en-US" sz="2800" dirty="0">
-                <a:latin typeface="Arial" charset="0"/>
-                <a:ea typeface="ＭＳ Ｐゴシック" charset="0"/>
-              </a:rPr>
-              <a:t>で書きなおすと、</a:t>
             </a:r>
             <a:endParaRPr lang="en-US" altLang="ja-JP" sz="2800" dirty="0">
               <a:latin typeface="Arial" charset="0"/>
@@ -5339,18 +5225,55 @@
               <a:buNone/>
             </a:pPr>
             <a:r>
-              <a:rPr lang="en-US" altLang="ja-JP" sz="2800" dirty="0" smtClean="0">
+              <a:rPr lang="en-US" altLang="ja-JP" sz="2800" dirty="0">
                 <a:latin typeface="Arial" charset="0"/>
                 <a:ea typeface="ＭＳ Ｐゴシック" charset="0"/>
               </a:rPr>
               <a:t>    </a:t>
             </a:r>
             <a:r>
+              <a:rPr lang="en-US" altLang="ja-JP" sz="2800" dirty="0" err="1">
+                <a:latin typeface="Arial" charset="0"/>
+                <a:ea typeface="ＭＳ Ｐゴシック" charset="0"/>
+              </a:rPr>
+              <a:t>int</a:t>
+            </a:r>
+            <a:r>
               <a:rPr lang="en-US" altLang="ja-JP" sz="2800" dirty="0">
                 <a:latin typeface="Arial" charset="0"/>
                 <a:ea typeface="ＭＳ Ｐゴシック" charset="0"/>
               </a:rPr>
-              <a:t>b :  </a:t>
+              <a:t>  b [2] [13] ;</a:t>
+            </a:r>
+          </a:p>
+          <a:p>
+            <a:pPr>
+              <a:buFontTx/>
+              <a:buNone/>
+            </a:pPr>
+            <a:r>
+              <a:rPr lang="ja-JP" altLang="en-US" sz="2800" dirty="0">
+                <a:latin typeface="Arial" charset="0"/>
+                <a:ea typeface="ＭＳ Ｐゴシック" charset="0"/>
+              </a:rPr>
+              <a:t>を後置記法で書きなおすと、</a:t>
+            </a:r>
+            <a:endParaRPr lang="en-US" altLang="ja-JP" sz="2800" dirty="0">
+              <a:latin typeface="Arial" charset="0"/>
+              <a:ea typeface="ＭＳ Ｐゴシック" charset="0"/>
+            </a:endParaRPr>
+          </a:p>
+          <a:p>
+            <a:pPr>
+              <a:buFontTx/>
+              <a:buNone/>
+            </a:pPr>
+            <a:r>
+              <a:rPr lang="en-US" altLang="ja-JP" sz="2800" dirty="0">
+                <a:latin typeface="Arial" charset="0"/>
+                <a:ea typeface="ＭＳ Ｐゴシック" charset="0"/>
+              </a:rPr>
+              <a:t>    b :  </a:t>
             </a:r>
             <a:r>
               <a:rPr lang="en-US" altLang="ja-JP" sz="2800" dirty="0" err="1">
@@ -5377,38 +5300,17 @@
                 <a:latin typeface="Arial" charset="0"/>
                 <a:ea typeface="ＭＳ Ｐゴシック" charset="0"/>
               </a:rPr>
-              <a:t>となる。</a:t>
-            </a:r>
-            <a:r>
-              <a:rPr lang="ja-JP" altLang="en-US" sz="2800" dirty="0" smtClean="0">
-                <a:latin typeface="Arial" charset="0"/>
-                <a:ea typeface="ＭＳ Ｐゴシック" charset="0"/>
-              </a:rPr>
-              <a:t>これに推論規則を適用することにより、式</a:t>
-            </a:r>
-            <a:r>
-              <a:rPr lang="en-US" altLang="ja-JP" sz="2800" dirty="0" smtClean="0">
-                <a:latin typeface="Arial" charset="0"/>
-                <a:ea typeface="ＭＳ Ｐゴシック" charset="0"/>
-              </a:rPr>
-              <a:t> b [</a:t>
+              <a:t>となる。これに推論規則を適用することにより、式</a:t>
             </a:r>
             <a:r>
               <a:rPr lang="en-US" altLang="ja-JP" sz="2800" dirty="0">
                 <a:latin typeface="Arial" charset="0"/>
                 <a:ea typeface="ＭＳ Ｐゴシック" charset="0"/>
               </a:rPr>
-              <a:t>1</a:t>
-            </a:r>
-            <a:r>
-              <a:rPr lang="en-US" altLang="ja-JP" sz="2800" dirty="0" smtClean="0">
-                <a:latin typeface="Arial" charset="0"/>
-                <a:ea typeface="ＭＳ Ｐゴシック" charset="0"/>
-              </a:rPr>
-              <a:t>] </a:t>
-            </a:r>
-            <a:r>
-              <a:rPr lang="ja-JP" altLang="en-US" sz="2800" smtClean="0">
+              <a:t> b [1] </a:t>
+            </a:r>
+            <a:r>
+              <a:rPr lang="ja-JP" altLang="en-US" sz="2800">
                 <a:latin typeface="Arial" charset="0"/>
                 <a:ea typeface="ＭＳ Ｐゴシック" charset="0"/>
               </a:rPr>
@@ -5443,14 +5345,14 @@
           </a:ln>
           <a:extLst>
             <a:ext uri="{909E8E84-426E-40dd-AFC4-6F175D3DCCD1}">
-              <a14:hiddenFill xmlns:a14="http://schemas.microsoft.com/office/drawing/2010/main">
+              <a14:hiddenFill xmlns:a14="http://schemas.microsoft.com/office/drawing/2010/main" xmlns="">
                 <a:solidFill>
                   <a:srgbClr val="FFFFFF"/>
                 </a:solidFill>
               </a14:hiddenFill>
             </a:ext>
             <a:ext uri="{91240B29-F687-4f45-9708-019B960494DF}">
-              <a14:hiddenLine xmlns:a14="http://schemas.microsoft.com/office/drawing/2010/main" w="9525">
+              <a14:hiddenLine xmlns:a14="http://schemas.microsoft.com/office/drawing/2010/main" xmlns="" w="9525">
                 <a:solidFill>
                   <a:srgbClr val="000000"/>
                 </a:solidFill>
@@ -5614,7 +5516,7 @@
           </a:ln>
           <a:extLst>
             <a:ext uri="{909E8E84-426E-40dd-AFC4-6F175D3DCCD1}">
-              <a14:hiddenFill xmlns:a14="http://schemas.microsoft.com/office/drawing/2010/main">
+              <a14:hiddenFill xmlns:a14="http://schemas.microsoft.com/office/drawing/2010/main" xmlns="">
                 <a:noFill/>
               </a14:hiddenFill>
             </a:ext>
@@ -5626,13 +5528,6 @@
   <p:clrMapOvr>
     <a:masterClrMapping/>
   </p:clrMapOvr>
-  <p:timing>
-    <p:tnLst>
-      <p:par>
-        <p:cTn xmlns:p14="http://schemas.microsoft.com/office/powerpoint/2010/main" id="1" dur="indefinite" restart="never" nodeType="tmRoot"/>
-      </p:par>
-    </p:tnLst>
-  </p:timing>
 </p:sld>
 </file>
 
@@ -5678,17 +5573,10 @@
                 <a:latin typeface="Arial" charset="0"/>
                 <a:ea typeface="ＭＳ Ｐゴシック" charset="0"/>
               </a:rPr>
-              <a:t>練習</a:t>
-            </a:r>
-            <a:r>
-              <a:rPr lang="ja-JP" altLang="en-US" dirty="0" smtClean="0">
-                <a:latin typeface="Arial" charset="0"/>
-                <a:ea typeface="ＭＳ Ｐゴシック" charset="0"/>
-              </a:rPr>
-              <a:t>問題</a:t>
-            </a:r>
-            <a:r>
-              <a:rPr lang="en-US" altLang="ja-JP" dirty="0" smtClean="0">
+              <a:t>練習問題</a:t>
+            </a:r>
+            <a:r>
+              <a:rPr lang="en-US" altLang="ja-JP" dirty="0">
                 <a:latin typeface="Arial" charset="0"/>
                 <a:ea typeface="ＭＳ Ｐゴシック" charset="0"/>
               </a:rPr>
@@ -5726,20 +5614,20 @@
               <a:buNone/>
             </a:pPr>
             <a:r>
-              <a:rPr lang="en-US" altLang="ja-JP" sz="2800" dirty="0" smtClean="0">
+              <a:rPr lang="en-US" altLang="ja-JP" sz="2800" dirty="0">
                 <a:latin typeface="Arial" charset="0"/>
                 <a:ea typeface="ＭＳ Ｐゴシック" charset="0"/>
               </a:rPr>
               <a:t>C</a:t>
             </a:r>
             <a:r>
-              <a:rPr lang="ja-JP" altLang="en-US" sz="2800" dirty="0" smtClean="0">
+              <a:rPr lang="ja-JP" altLang="en-US" sz="2800" dirty="0">
                 <a:latin typeface="Arial" charset="0"/>
                 <a:ea typeface="ＭＳ Ｐゴシック" charset="0"/>
               </a:rPr>
               <a:t>言語の変数宣言</a:t>
             </a:r>
-            <a:endParaRPr lang="en-US" altLang="ja-JP" sz="2800" dirty="0" smtClean="0">
+            <a:endParaRPr lang="en-US" altLang="ja-JP" sz="2800" dirty="0">
               <a:latin typeface="Arial" charset="0"/>
               <a:ea typeface="ＭＳ Ｐゴシック" charset="0"/>
             </a:endParaRPr>
@@ -5750,7 +5638,7 @@
               <a:buNone/>
             </a:pPr>
             <a:r>
-              <a:rPr lang="en-US" altLang="ja-JP" sz="2800" dirty="0" smtClean="0">
+              <a:rPr lang="en-US" altLang="ja-JP" sz="2800" dirty="0">
                 <a:latin typeface="Arial" charset="0"/>
                 <a:ea typeface="ＭＳ Ｐゴシック" charset="0"/>
               </a:rPr>
@@ -5777,25 +5665,11 @@
               <a:buNone/>
             </a:pPr>
             <a:r>
-              <a:rPr lang="ja-JP" altLang="en-US" sz="2800" dirty="0" smtClean="0">
-                <a:latin typeface="Arial" charset="0"/>
-                <a:ea typeface="ＭＳ Ｐゴシック" charset="0"/>
-              </a:rPr>
-              <a:t>のもと</a:t>
-            </a:r>
-            <a:r>
               <a:rPr lang="ja-JP" altLang="en-US" sz="2800" dirty="0">
                 <a:latin typeface="Arial" charset="0"/>
                 <a:ea typeface="ＭＳ Ｐゴシック" charset="0"/>
               </a:rPr>
-              <a:t>で</a:t>
-            </a:r>
-            <a:r>
-              <a:rPr lang="ja-JP" altLang="en-US" sz="2800" dirty="0" smtClean="0">
-                <a:latin typeface="Arial" charset="0"/>
-                <a:ea typeface="ＭＳ Ｐゴシック" charset="0"/>
-              </a:rPr>
-              <a:t>、式  </a:t>
+              <a:t>のもとで、式  </a:t>
             </a:r>
             <a:r>
               <a:rPr lang="en-US" altLang="ja-JP" sz="2800" dirty="0">
@@ -5809,42 +5683,21 @@
                 <a:latin typeface="Arial" charset="0"/>
                 <a:ea typeface="ＭＳ Ｐゴシック" charset="0"/>
               </a:rPr>
-              <a:t>の</a:t>
-            </a:r>
-            <a:r>
-              <a:rPr lang="ja-JP" altLang="en-US" sz="2800" dirty="0" smtClean="0">
-                <a:latin typeface="Arial" charset="0"/>
-                <a:ea typeface="ＭＳ Ｐゴシック" charset="0"/>
-              </a:rPr>
-              <a:t>型を、変数</a:t>
-            </a:r>
-            <a:r>
-              <a:rPr lang="en-US" altLang="ja-JP" sz="2800" dirty="0" smtClean="0">
+              <a:t>の型を、変数</a:t>
+            </a:r>
+            <a:r>
+              <a:rPr lang="en-US" altLang="ja-JP" sz="2800" dirty="0">
                 <a:latin typeface="Arial" charset="0"/>
                 <a:ea typeface="ＭＳ Ｐゴシック" charset="0"/>
               </a:rPr>
               <a:t>b</a:t>
             </a:r>
             <a:r>
-              <a:rPr lang="ja-JP" altLang="en-US" sz="2800" dirty="0" smtClean="0">
-                <a:latin typeface="Arial" charset="0"/>
-                <a:ea typeface="ＭＳ Ｐゴシック" charset="0"/>
-              </a:rPr>
-              <a:t>の型の後置記法による宣言</a:t>
-            </a:r>
-            <a:r>
               <a:rPr lang="ja-JP" altLang="en-US" sz="2800" dirty="0">
                 <a:latin typeface="Arial" charset="0"/>
                 <a:ea typeface="ＭＳ Ｐゴシック" charset="0"/>
               </a:rPr>
-              <a:t>から推論規則で導け</a:t>
-            </a:r>
-            <a:r>
-              <a:rPr lang="ja-JP" altLang="en-US" sz="2800" dirty="0" smtClean="0">
-                <a:latin typeface="Arial" charset="0"/>
-                <a:ea typeface="ＭＳ Ｐゴシック" charset="0"/>
-              </a:rPr>
-              <a:t>。</a:t>
+              <a:t>の型の後置記法による宣言から推論規則で導け。</a:t>
             </a:r>
             <a:endParaRPr lang="en-US" altLang="ja-JP" sz="2800" dirty="0">
               <a:latin typeface="Arial" charset="0"/>
@@ -6067,14 +5920,14 @@
           </a:ln>
           <a:extLst>
             <a:ext uri="{909E8E84-426E-40dd-AFC4-6F175D3DCCD1}">
-              <a14:hiddenFill xmlns:a14="http://schemas.microsoft.com/office/drawing/2010/main">
+              <a14:hiddenFill xmlns:a14="http://schemas.microsoft.com/office/drawing/2010/main" xmlns="">
                 <a:solidFill>
                   <a:srgbClr val="FFFFFF"/>
                 </a:solidFill>
               </a14:hiddenFill>
             </a:ext>
             <a:ext uri="{91240B29-F687-4f45-9708-019B960494DF}">
-              <a14:hiddenLine xmlns:a14="http://schemas.microsoft.com/office/drawing/2010/main" w="9525">
+              <a14:hiddenLine xmlns:a14="http://schemas.microsoft.com/office/drawing/2010/main" xmlns="" w="9525">
                 <a:solidFill>
                   <a:srgbClr val="000000"/>
                 </a:solidFill>
@@ -6245,7 +6098,7 @@
           </a:ln>
           <a:extLst>
             <a:ext uri="{909E8E84-426E-40dd-AFC4-6F175D3DCCD1}">
-              <a14:hiddenFill xmlns:a14="http://schemas.microsoft.com/office/drawing/2010/main">
+              <a14:hiddenFill xmlns:a14="http://schemas.microsoft.com/office/drawing/2010/main" xmlns="">
                 <a:noFill/>
               </a14:hiddenFill>
             </a:ext>
@@ -6279,7 +6132,7 @@
           </a:ln>
           <a:extLst>
             <a:ext uri="{909E8E84-426E-40dd-AFC4-6F175D3DCCD1}">
-              <a14:hiddenFill xmlns:a14="http://schemas.microsoft.com/office/drawing/2010/main">
+              <a14:hiddenFill xmlns:a14="http://schemas.microsoft.com/office/drawing/2010/main" xmlns="">
                 <a:noFill/>
               </a14:hiddenFill>
             </a:ext>
@@ -6291,13 +6144,6 @@
   <p:clrMapOvr>
     <a:masterClrMapping/>
   </p:clrMapOvr>
-  <p:timing>
-    <p:tnLst>
-      <p:par>
-        <p:cTn xmlns:p14="http://schemas.microsoft.com/office/powerpoint/2010/main" id="1" dur="indefinite" restart="never" nodeType="tmRoot"/>
-      </p:par>
-    </p:tnLst>
-  </p:timing>
 </p:sld>
 </file>
 
@@ -6343,17 +6189,10 @@
                 <a:latin typeface="Arial" charset="0"/>
                 <a:ea typeface="ＭＳ Ｐゴシック" charset="0"/>
               </a:rPr>
-              <a:t>練習</a:t>
-            </a:r>
-            <a:r>
-              <a:rPr lang="ja-JP" altLang="en-US" dirty="0" smtClean="0">
-                <a:latin typeface="Arial" charset="0"/>
-                <a:ea typeface="ＭＳ Ｐゴシック" charset="0"/>
-              </a:rPr>
-              <a:t>問題</a:t>
-            </a:r>
-            <a:r>
-              <a:rPr lang="en-US" altLang="ja-JP" dirty="0" smtClean="0">
+              <a:t>練習問題</a:t>
+            </a:r>
+            <a:r>
+              <a:rPr lang="en-US" altLang="ja-JP" dirty="0">
                 <a:latin typeface="Arial" charset="0"/>
                 <a:ea typeface="ＭＳ Ｐゴシック" charset="0"/>
               </a:rPr>
@@ -6391,20 +6230,20 @@
               <a:buNone/>
             </a:pPr>
             <a:r>
-              <a:rPr lang="en-US" altLang="ja-JP" sz="2800" dirty="0" smtClean="0">
+              <a:rPr lang="en-US" altLang="ja-JP" sz="2800" dirty="0">
                 <a:latin typeface="Arial" charset="0"/>
                 <a:ea typeface="ＭＳ Ｐゴシック" charset="0"/>
               </a:rPr>
               <a:t>C</a:t>
             </a:r>
             <a:r>
-              <a:rPr lang="ja-JP" altLang="en-US" sz="2800" dirty="0" smtClean="0">
+              <a:rPr lang="ja-JP" altLang="en-US" sz="2800" dirty="0">
                 <a:latin typeface="Arial" charset="0"/>
                 <a:ea typeface="ＭＳ Ｐゴシック" charset="0"/>
               </a:rPr>
               <a:t>言語の変数宣言</a:t>
             </a:r>
-            <a:endParaRPr lang="en-US" altLang="ja-JP" sz="2800" dirty="0" smtClean="0">
+            <a:endParaRPr lang="en-US" altLang="ja-JP" sz="2800" dirty="0">
               <a:latin typeface="Arial" charset="0"/>
               <a:ea typeface="ＭＳ Ｐゴシック" charset="0"/>
             </a:endParaRPr>
@@ -6415,18 +6254,11 @@
               <a:buNone/>
             </a:pPr>
             <a:r>
-              <a:rPr lang="en-US" altLang="ja-JP" sz="2800" dirty="0" smtClean="0">
-                <a:latin typeface="Arial" charset="0"/>
-                <a:ea typeface="ＭＳ Ｐゴシック" charset="0"/>
-              </a:rPr>
-              <a:t>   </a:t>
-            </a:r>
-            <a:r>
               <a:rPr lang="en-US" altLang="ja-JP" sz="2800" dirty="0">
                 <a:latin typeface="Arial" charset="0"/>
                 <a:ea typeface="ＭＳ Ｐゴシック" charset="0"/>
               </a:rPr>
-              <a:t>p : </a:t>
+              <a:t>   p : </a:t>
             </a:r>
             <a:r>
               <a:rPr lang="en-US" altLang="ja-JP" sz="2800" dirty="0" err="1">
@@ -6467,14 +6299,7 @@
                 <a:latin typeface="Arial" charset="0"/>
                 <a:ea typeface="ＭＳ Ｐゴシック" charset="0"/>
               </a:rPr>
-              <a:t> [10</a:t>
-            </a:r>
-            <a:r>
-              <a:rPr lang="en-US" altLang="ja-JP" sz="2800" dirty="0" smtClean="0">
-                <a:latin typeface="Arial" charset="0"/>
-                <a:ea typeface="ＭＳ Ｐゴシック" charset="0"/>
-              </a:rPr>
-              <a:t>]</a:t>
+              <a:t> [10]</a:t>
             </a:r>
           </a:p>
           <a:p>
@@ -6483,7 +6308,7 @@
               <a:buNone/>
             </a:pPr>
             <a:r>
-              <a:rPr lang="ja-JP" altLang="en-US" sz="2800" dirty="0" smtClean="0">
+              <a:rPr lang="ja-JP" altLang="en-US" sz="2800" dirty="0">
                 <a:latin typeface="Arial" charset="0"/>
                 <a:ea typeface="ＭＳ Ｐゴシック" charset="0"/>
               </a:rPr>
@@ -6662,14 +6487,14 @@
           </a:ln>
           <a:extLst>
             <a:ext uri="{909E8E84-426E-40dd-AFC4-6F175D3DCCD1}">
-              <a14:hiddenFill xmlns:a14="http://schemas.microsoft.com/office/drawing/2010/main">
+              <a14:hiddenFill xmlns:a14="http://schemas.microsoft.com/office/drawing/2010/main" xmlns="">
                 <a:solidFill>
                   <a:srgbClr val="FFFFFF"/>
                 </a:solidFill>
               </a14:hiddenFill>
             </a:ext>
             <a:ext uri="{91240B29-F687-4f45-9708-019B960494DF}">
-              <a14:hiddenLine xmlns:a14="http://schemas.microsoft.com/office/drawing/2010/main" w="9525">
+              <a14:hiddenLine xmlns:a14="http://schemas.microsoft.com/office/drawing/2010/main" xmlns="" w="9525">
                 <a:solidFill>
                   <a:srgbClr val="000000"/>
                 </a:solidFill>
@@ -6715,14 +6540,14 @@
           </a:ln>
           <a:extLst>
             <a:ext uri="{909E8E84-426E-40dd-AFC4-6F175D3DCCD1}">
-              <a14:hiddenFill xmlns:a14="http://schemas.microsoft.com/office/drawing/2010/main">
+              <a14:hiddenFill xmlns:a14="http://schemas.microsoft.com/office/drawing/2010/main" xmlns="">
                 <a:solidFill>
                   <a:srgbClr val="FFFFFF"/>
                 </a:solidFill>
               </a14:hiddenFill>
             </a:ext>
             <a:ext uri="{91240B29-F687-4f45-9708-019B960494DF}">
-              <a14:hiddenLine xmlns:a14="http://schemas.microsoft.com/office/drawing/2010/main" w="9525">
+              <a14:hiddenLine xmlns:a14="http://schemas.microsoft.com/office/drawing/2010/main" xmlns="" w="9525">
                 <a:solidFill>
                   <a:srgbClr val="000000"/>
                 </a:solidFill>
@@ -6893,7 +6718,7 @@
           </a:ln>
           <a:extLst>
             <a:ext uri="{909E8E84-426E-40dd-AFC4-6F175D3DCCD1}">
-              <a14:hiddenFill xmlns:a14="http://schemas.microsoft.com/office/drawing/2010/main">
+              <a14:hiddenFill xmlns:a14="http://schemas.microsoft.com/office/drawing/2010/main" xmlns="">
                 <a:noFill/>
               </a14:hiddenFill>
             </a:ext>
@@ -6927,7 +6752,7 @@
           </a:ln>
           <a:extLst>
             <a:ext uri="{909E8E84-426E-40dd-AFC4-6F175D3DCCD1}">
-              <a14:hiddenFill xmlns:a14="http://schemas.microsoft.com/office/drawing/2010/main">
+              <a14:hiddenFill xmlns:a14="http://schemas.microsoft.com/office/drawing/2010/main" xmlns="">
                 <a:noFill/>
               </a14:hiddenFill>
             </a:ext>
@@ -6961,7 +6786,7 @@
           </a:ln>
           <a:extLst>
             <a:ext uri="{909E8E84-426E-40dd-AFC4-6F175D3DCCD1}">
-              <a14:hiddenFill xmlns:a14="http://schemas.microsoft.com/office/drawing/2010/main">
+              <a14:hiddenFill xmlns:a14="http://schemas.microsoft.com/office/drawing/2010/main" xmlns="">
                 <a:noFill/>
               </a14:hiddenFill>
             </a:ext>
@@ -6973,13 +6798,6 @@
   <p:clrMapOvr>
     <a:masterClrMapping/>
   </p:clrMapOvr>
-  <p:timing>
-    <p:tnLst>
-      <p:par>
-        <p:cTn xmlns:p14="http://schemas.microsoft.com/office/powerpoint/2010/main" id="1" dur="indefinite" restart="never" nodeType="tmRoot"/>
-      </p:par>
-    </p:tnLst>
-  </p:timing>
 </p:sld>
 </file>
 
@@ -7020,17 +6838,10 @@
                 <a:latin typeface="Arial" charset="0"/>
                 <a:ea typeface="ＭＳ Ｐゴシック" charset="0"/>
               </a:rPr>
-              <a:t>練習</a:t>
-            </a:r>
-            <a:r>
-              <a:rPr lang="ja-JP" altLang="en-US" dirty="0" smtClean="0">
-                <a:latin typeface="Arial" charset="0"/>
-                <a:ea typeface="ＭＳ Ｐゴシック" charset="0"/>
-              </a:rPr>
-              <a:t>問題</a:t>
-            </a:r>
-            <a:r>
-              <a:rPr lang="en-US" altLang="ja-JP" dirty="0" smtClean="0">
+              <a:t>練習問題</a:t>
+            </a:r>
+            <a:r>
+              <a:rPr lang="en-US" altLang="ja-JP" dirty="0">
                 <a:latin typeface="Arial" charset="0"/>
                 <a:ea typeface="ＭＳ Ｐゴシック" charset="0"/>
               </a:rPr>
@@ -7063,27 +6874,20 @@
               <a:buNone/>
             </a:pPr>
             <a:r>
-              <a:rPr lang="en-US" altLang="ja-JP" dirty="0" smtClean="0">
+              <a:rPr lang="en-US" altLang="ja-JP" dirty="0">
                 <a:latin typeface="Arial" charset="0"/>
                 <a:ea typeface="ＭＳ Ｐゴシック" charset="0"/>
               </a:rPr>
               <a:t>C</a:t>
             </a:r>
             <a:r>
-              <a:rPr lang="ja-JP" altLang="en-US" dirty="0" smtClean="0">
-                <a:latin typeface="Arial" charset="0"/>
-                <a:ea typeface="ＭＳ Ｐゴシック" charset="0"/>
-              </a:rPr>
-              <a:t>言語の変数</a:t>
-            </a:r>
-            <a:r>
               <a:rPr lang="ja-JP" altLang="en-US" dirty="0">
                 <a:latin typeface="Arial" charset="0"/>
                 <a:ea typeface="ＭＳ Ｐゴシック" charset="0"/>
               </a:rPr>
-              <a:t>宣言</a:t>
-            </a:r>
-            <a:endParaRPr lang="en-US" altLang="ja-JP" dirty="0" smtClean="0">
+              <a:t>言語の変数宣言</a:t>
+            </a:r>
+            <a:endParaRPr lang="en-US" altLang="ja-JP" dirty="0">
               <a:latin typeface="Arial" charset="0"/>
               <a:ea typeface="ＭＳ Ｐゴシック" charset="0"/>
             </a:endParaRPr>
@@ -7094,18 +6898,11 @@
               <a:buNone/>
             </a:pPr>
             <a:r>
-              <a:rPr lang="en-US" altLang="ja-JP" dirty="0" smtClean="0">
-                <a:latin typeface="Arial" charset="0"/>
-                <a:ea typeface="ＭＳ Ｐゴシック" charset="0"/>
-              </a:rPr>
-              <a:t>    char </a:t>
-            </a:r>
-            <a:r>
               <a:rPr lang="en-US" altLang="ja-JP" dirty="0">
                 <a:latin typeface="Arial" charset="0"/>
                 <a:ea typeface="ＭＳ Ｐゴシック" charset="0"/>
               </a:rPr>
-              <a:t>( * ( * y [3] ) ( ) ) [ 5 ]  ;</a:t>
+              <a:t>    char ( * ( * y [3] ) ( ) ) [ 5 ]  ;</a:t>
             </a:r>
           </a:p>
           <a:p>
@@ -7114,18 +6911,11 @@
               <a:buNone/>
             </a:pPr>
             <a:r>
-              <a:rPr lang="ja-JP" altLang="en-US" dirty="0" smtClean="0">
-                <a:latin typeface="Arial" charset="0"/>
-                <a:ea typeface="ＭＳ Ｐゴシック" charset="0"/>
-              </a:rPr>
-              <a:t>を</a:t>
-            </a:r>
-            <a:r>
               <a:rPr lang="ja-JP" altLang="en-US" dirty="0">
                 <a:latin typeface="Arial" charset="0"/>
                 <a:ea typeface="ＭＳ Ｐゴシック" charset="0"/>
               </a:rPr>
-              <a:t>型の後置記法による宣言に直せ。</a:t>
+              <a:t>を型の後置記法による宣言に直せ。</a:t>
             </a:r>
           </a:p>
         </p:txBody>
@@ -7140,13 +6930,6 @@
   <p:clrMapOvr>
     <a:masterClrMapping/>
   </p:clrMapOvr>
-  <p:timing>
-    <p:tnLst>
-      <p:par>
-        <p:cTn xmlns:p14="http://schemas.microsoft.com/office/powerpoint/2010/main" id="1" dur="indefinite" restart="never" nodeType="tmRoot"/>
-      </p:par>
-    </p:tnLst>
-  </p:timing>
 </p:sld>
 </file>
 
@@ -7212,18 +6995,11 @@
               <a:buNone/>
             </a:pPr>
             <a:r>
-              <a:rPr lang="en-US" altLang="ja-JP" dirty="0" smtClean="0">
-                <a:latin typeface="Arial" charset="0"/>
-                <a:ea typeface="ＭＳ Ｐゴシック" charset="0"/>
-              </a:rPr>
-              <a:t>    char </a:t>
-            </a:r>
-            <a:r>
               <a:rPr lang="en-US" altLang="ja-JP" dirty="0">
                 <a:latin typeface="Arial" charset="0"/>
                 <a:ea typeface="ＭＳ Ｐゴシック" charset="0"/>
               </a:rPr>
-              <a:t>( * ( * y [3] ) ( ) ) [ 5 ] ;</a:t>
+              <a:t>    char ( * ( * y [3] ) ( ) ) [ 5 ] ;</a:t>
             </a:r>
           </a:p>
           <a:p>
@@ -7232,18 +7008,11 @@
               <a:buNone/>
             </a:pPr>
             <a:r>
-              <a:rPr lang="ja-JP" altLang="en-US" dirty="0" smtClean="0">
-                <a:latin typeface="Arial" charset="0"/>
-                <a:ea typeface="ＭＳ Ｐゴシック" charset="0"/>
-              </a:rPr>
-              <a:t>を内側</a:t>
-            </a:r>
-            <a:r>
               <a:rPr lang="ja-JP" altLang="en-US" dirty="0">
                 <a:latin typeface="Arial" charset="0"/>
                 <a:ea typeface="ＭＳ Ｐゴシック" charset="0"/>
               </a:rPr>
-              <a:t>から順に読むと、</a:t>
+              <a:t>を内側から順に読むと、</a:t>
             </a:r>
             <a:endParaRPr lang="en-US" altLang="ja-JP" dirty="0">
               <a:latin typeface="Arial" charset="0"/>
@@ -7260,21 +7029,7 @@
                 <a:latin typeface="Arial" charset="0"/>
                 <a:ea typeface="ＭＳ Ｐゴシック" charset="0"/>
               </a:rPr>
-              <a:t> </a:t>
-            </a:r>
-            <a:r>
-              <a:rPr lang="en-US" altLang="ja-JP" dirty="0" smtClean="0">
-                <a:latin typeface="Arial" charset="0"/>
-                <a:ea typeface="ＭＳ Ｐゴシック" charset="0"/>
-              </a:rPr>
-              <a:t>    [</a:t>
-            </a:r>
-            <a:r>
-              <a:rPr lang="en-US" altLang="ja-JP" dirty="0">
-                <a:latin typeface="Arial" charset="0"/>
-                <a:ea typeface="ＭＳ Ｐゴシック" charset="0"/>
-              </a:rPr>
-              <a:t>3]  *  ( )  *  [ 5 ]  char</a:t>
+              <a:t>     [3]  *  ( )  *  [ 5 ]  char</a:t>
             </a:r>
           </a:p>
           <a:p>
@@ -7304,21 +7059,7 @@
                 <a:latin typeface="Arial" charset="0"/>
                 <a:ea typeface="ＭＳ Ｐゴシック" charset="0"/>
               </a:rPr>
-              <a:t> </a:t>
-            </a:r>
-            <a:r>
-              <a:rPr lang="en-US" altLang="ja-JP" dirty="0" smtClean="0">
-                <a:latin typeface="Arial" charset="0"/>
-                <a:ea typeface="ＭＳ Ｐゴシック" charset="0"/>
-              </a:rPr>
-              <a:t>    y </a:t>
-            </a:r>
-            <a:r>
-              <a:rPr lang="en-US" altLang="ja-JP" dirty="0">
-                <a:latin typeface="Arial" charset="0"/>
-                <a:ea typeface="ＭＳ Ｐゴシック" charset="0"/>
-              </a:rPr>
-              <a:t>: char [ 5 ]  *  ( )  *  [3]</a:t>
+              <a:t>     y : char [ 5 ]  *  ( )  *  [3]</a:t>
             </a:r>
           </a:p>
           <a:p>
@@ -7365,13 +7106,6 @@
   <p:clrMapOvr>
     <a:masterClrMapping/>
   </p:clrMapOvr>
-  <p:timing>
-    <p:tnLst>
-      <p:par>
-        <p:cTn xmlns:p14="http://schemas.microsoft.com/office/powerpoint/2010/main" id="1" dur="indefinite" restart="never" nodeType="tmRoot"/>
-      </p:par>
-    </p:tnLst>
-  </p:timing>
 </p:sld>
 </file>
 
@@ -7412,14 +7146,7 @@
                 <a:latin typeface="Arial" charset="0"/>
                 <a:ea typeface="ＭＳ Ｐゴシック" charset="0"/>
               </a:rPr>
-              <a:t>練習</a:t>
-            </a:r>
-            <a:r>
-              <a:rPr lang="ja-JP" altLang="en-US" dirty="0" smtClean="0">
-                <a:latin typeface="Arial" charset="0"/>
-                <a:ea typeface="ＭＳ Ｐゴシック" charset="0"/>
-              </a:rPr>
-              <a:t>問題</a:t>
+              <a:t>練習問題</a:t>
             </a:r>
             <a:r>
               <a:rPr lang="en-US" altLang="ja-JP" dirty="0">
@@ -7455,20 +7182,20 @@
               <a:buNone/>
             </a:pPr>
             <a:r>
-              <a:rPr lang="en-US" altLang="ja-JP" dirty="0" smtClean="0">
+              <a:rPr lang="en-US" altLang="ja-JP" dirty="0">
                 <a:latin typeface="Arial" charset="0"/>
                 <a:ea typeface="ＭＳ Ｐゴシック" charset="0"/>
               </a:rPr>
               <a:t>C</a:t>
             </a:r>
             <a:r>
-              <a:rPr lang="ja-JP" altLang="en-US" dirty="0" smtClean="0">
+              <a:rPr lang="ja-JP" altLang="en-US" dirty="0">
                 <a:latin typeface="Arial" charset="0"/>
                 <a:ea typeface="ＭＳ Ｐゴシック" charset="0"/>
               </a:rPr>
               <a:t>言語の変数宣言</a:t>
             </a:r>
-            <a:endParaRPr lang="en-US" altLang="ja-JP" dirty="0" smtClean="0">
+            <a:endParaRPr lang="en-US" altLang="ja-JP" dirty="0">
               <a:latin typeface="Arial" charset="0"/>
               <a:ea typeface="ＭＳ Ｐゴシック" charset="0"/>
             </a:endParaRPr>
@@ -7479,18 +7206,11 @@
               <a:buNone/>
             </a:pPr>
             <a:r>
-              <a:rPr lang="en-US" altLang="ja-JP" dirty="0" smtClean="0">
-                <a:latin typeface="Arial" charset="0"/>
-                <a:ea typeface="ＭＳ Ｐゴシック" charset="0"/>
-              </a:rPr>
-              <a:t>(</a:t>
-            </a:r>
-            <a:r>
               <a:rPr lang="en-US" altLang="ja-JP" dirty="0">
                 <a:latin typeface="Arial" charset="0"/>
                 <a:ea typeface="ＭＳ Ｐゴシック" charset="0"/>
               </a:rPr>
-              <a:t>1) </a:t>
+              <a:t>(1) </a:t>
             </a:r>
             <a:r>
               <a:rPr lang="en-US" altLang="ja-JP" dirty="0" err="1">
@@ -7559,13 +7279,6 @@
   <p:clrMapOvr>
     <a:masterClrMapping/>
   </p:clrMapOvr>
-  <p:timing>
-    <p:tnLst>
-      <p:par>
-        <p:cTn xmlns:p14="http://schemas.microsoft.com/office/powerpoint/2010/main" id="1" dur="indefinite" restart="never" nodeType="tmRoot"/>
-      </p:par>
-    </p:tnLst>
-  </p:timing>
 </p:sld>
 </file>
 
@@ -7632,19 +7345,19 @@
               <a:defRPr/>
             </a:pPr>
             <a:r>
-              <a:rPr lang="en-US" altLang="ja-JP" dirty="0" smtClean="0">
+              <a:rPr lang="en-US" altLang="ja-JP" dirty="0">
                 <a:cs typeface="+mn-cs"/>
               </a:rPr>
               <a:t>(1) </a:t>
             </a:r>
             <a:r>
-              <a:rPr lang="en-US" altLang="ja-JP" dirty="0" err="1" smtClean="0">
+              <a:rPr lang="en-US" altLang="ja-JP" dirty="0" err="1">
                 <a:cs typeface="+mn-cs"/>
               </a:rPr>
               <a:t>int</a:t>
             </a:r>
             <a:r>
-              <a:rPr lang="en-US" altLang="ja-JP" dirty="0" smtClean="0">
+              <a:rPr lang="en-US" altLang="ja-JP" dirty="0">
                 <a:cs typeface="+mn-cs"/>
               </a:rPr>
               <a:t>  * z;</a:t>
@@ -7657,7 +7370,7 @@
               <a:defRPr/>
             </a:pPr>
             <a:r>
-              <a:rPr lang="en-US" altLang="ja-JP" dirty="0" smtClean="0">
+              <a:rPr lang="en-US" altLang="ja-JP" dirty="0">
                 <a:cs typeface="+mn-cs"/>
               </a:rPr>
               <a:t>(2) </a:t>
@@ -7666,16 +7379,10 @@
               <a:rPr lang="en-US" altLang="ja-JP" dirty="0" err="1">
                 <a:cs typeface="+mn-cs"/>
               </a:rPr>
-              <a:t>i</a:t>
-            </a:r>
-            <a:r>
-              <a:rPr lang="en-US" altLang="ja-JP" dirty="0" err="1" smtClean="0">
-                <a:cs typeface="+mn-cs"/>
-              </a:rPr>
-              <a:t>nt</a:t>
-            </a:r>
-            <a:r>
-              <a:rPr lang="en-US" altLang="ja-JP" dirty="0" smtClean="0">
+              <a:t>int</a:t>
+            </a:r>
+            <a:r>
+              <a:rPr lang="en-US" altLang="ja-JP" dirty="0">
                 <a:cs typeface="+mn-cs"/>
               </a:rPr>
               <a:t> c [ 13 ];</a:t>
@@ -7688,18 +7395,18 @@
               <a:defRPr/>
             </a:pPr>
             <a:r>
-              <a:rPr lang="ja-JP" altLang="en-US" dirty="0" err="1" smtClean="0">
+              <a:rPr lang="ja-JP" altLang="en-US" dirty="0" err="1">
                 <a:cs typeface="+mn-cs"/>
               </a:rPr>
               <a:t>を後置</a:t>
             </a:r>
             <a:r>
-              <a:rPr lang="ja-JP" altLang="en-US" dirty="0" smtClean="0">
+              <a:rPr lang="ja-JP" altLang="en-US" dirty="0">
                 <a:cs typeface="+mn-cs"/>
               </a:rPr>
               <a:t>記法に直すと、</a:t>
             </a:r>
-            <a:endParaRPr lang="en-US" altLang="ja-JP" dirty="0" smtClean="0">
+            <a:endParaRPr lang="en-US" altLang="ja-JP" dirty="0">
               <a:cs typeface="+mn-cs"/>
             </a:endParaRPr>
           </a:p>
@@ -7710,19 +7417,19 @@
               <a:defRPr/>
             </a:pPr>
             <a:r>
-              <a:rPr lang="en-US" altLang="ja-JP" dirty="0" smtClean="0">
+              <a:rPr lang="en-US" altLang="ja-JP" dirty="0">
                 <a:cs typeface="+mn-cs"/>
               </a:rPr>
               <a:t> z : </a:t>
             </a:r>
             <a:r>
-              <a:rPr lang="en-US" altLang="ja-JP" dirty="0" err="1" smtClean="0">
+              <a:rPr lang="en-US" altLang="ja-JP" dirty="0" err="1">
                 <a:cs typeface="+mn-cs"/>
               </a:rPr>
               <a:t>int</a:t>
             </a:r>
             <a:r>
-              <a:rPr lang="en-US" altLang="ja-JP" dirty="0" smtClean="0">
+              <a:rPr lang="en-US" altLang="ja-JP" dirty="0">
                 <a:cs typeface="+mn-cs"/>
               </a:rPr>
               <a:t> *</a:t>
@@ -7735,19 +7442,19 @@
               <a:defRPr/>
             </a:pPr>
             <a:r>
-              <a:rPr lang="en-US" altLang="ja-JP" dirty="0" smtClean="0">
+              <a:rPr lang="en-US" altLang="ja-JP" dirty="0">
                 <a:cs typeface="+mn-cs"/>
               </a:rPr>
               <a:t> c : </a:t>
             </a:r>
             <a:r>
-              <a:rPr lang="en-US" altLang="ja-JP" dirty="0" err="1" smtClean="0">
+              <a:rPr lang="en-US" altLang="ja-JP" dirty="0" err="1">
                 <a:cs typeface="+mn-cs"/>
               </a:rPr>
               <a:t>int</a:t>
             </a:r>
             <a:r>
-              <a:rPr lang="en-US" altLang="ja-JP" dirty="0" smtClean="0">
+              <a:rPr lang="en-US" altLang="ja-JP" dirty="0">
                 <a:cs typeface="+mn-cs"/>
               </a:rPr>
               <a:t> [13]</a:t>
@@ -7760,12 +7467,12 @@
               <a:defRPr/>
             </a:pPr>
             <a:r>
-              <a:rPr lang="ja-JP" altLang="en-US" dirty="0" smtClean="0">
+              <a:rPr lang="ja-JP" altLang="en-US" dirty="0">
                 <a:cs typeface="+mn-cs"/>
               </a:rPr>
               <a:t>となる。</a:t>
             </a:r>
-            <a:endParaRPr lang="en-US" altLang="ja-JP" dirty="0" smtClean="0">
+            <a:endParaRPr lang="en-US" altLang="ja-JP" dirty="0">
               <a:cs typeface="+mn-cs"/>
             </a:endParaRPr>
           </a:p>
@@ -7776,13 +7483,6 @@
   <p:clrMapOvr>
     <a:masterClrMapping/>
   </p:clrMapOvr>
-  <p:timing>
-    <p:tnLst>
-      <p:par>
-        <p:cTn xmlns:p14="http://schemas.microsoft.com/office/powerpoint/2010/main" id="1" dur="indefinite" restart="never" nodeType="tmRoot"/>
-      </p:par>
-    </p:tnLst>
-  </p:timing>
 </p:sld>
 </file>
 
@@ -7823,17 +7523,10 @@
                 <a:latin typeface="Arial" charset="0"/>
                 <a:ea typeface="ＭＳ Ｐゴシック" charset="0"/>
               </a:rPr>
-              <a:t>練習</a:t>
-            </a:r>
-            <a:r>
-              <a:rPr lang="ja-JP" altLang="en-US" dirty="0" smtClean="0">
-                <a:latin typeface="Arial" charset="0"/>
-                <a:ea typeface="ＭＳ Ｐゴシック" charset="0"/>
-              </a:rPr>
-              <a:t>問題</a:t>
-            </a:r>
-            <a:r>
-              <a:rPr lang="en-US" altLang="ja-JP" dirty="0" smtClean="0">
+              <a:t>練習問題</a:t>
+            </a:r>
+            <a:r>
+              <a:rPr lang="en-US" altLang="ja-JP" dirty="0">
                 <a:latin typeface="Arial" charset="0"/>
                 <a:ea typeface="ＭＳ Ｐゴシック" charset="0"/>
               </a:rPr>
@@ -7876,16 +7569,9 @@
                 <a:latin typeface="Arial" charset="0"/>
                 <a:ea typeface="ＭＳ Ｐゴシック" charset="0"/>
               </a:rPr>
-              <a:t>言語の変数</a:t>
-            </a:r>
-            <a:r>
-              <a:rPr lang="ja-JP" altLang="en-US" dirty="0" smtClean="0">
-                <a:latin typeface="Arial" charset="0"/>
-                <a:ea typeface="ＭＳ Ｐゴシック" charset="0"/>
-              </a:rPr>
-              <a:t>宣言</a:t>
-            </a:r>
-            <a:endParaRPr lang="en-US" altLang="ja-JP" dirty="0" smtClean="0">
+              <a:t>言語の変数宣言</a:t>
+            </a:r>
+            <a:endParaRPr lang="en-US" altLang="ja-JP" dirty="0">
               <a:latin typeface="Arial" charset="0"/>
               <a:ea typeface="ＭＳ Ｐゴシック" charset="0"/>
             </a:endParaRPr>
@@ -7896,18 +7582,11 @@
               <a:buNone/>
             </a:pPr>
             <a:r>
-              <a:rPr lang="en-US" altLang="ja-JP" dirty="0" smtClean="0">
-                <a:latin typeface="Arial" charset="0"/>
-                <a:ea typeface="ＭＳ Ｐゴシック" charset="0"/>
-              </a:rPr>
-              <a:t>(</a:t>
-            </a:r>
-            <a:r>
               <a:rPr lang="en-US" altLang="ja-JP" dirty="0">
                 <a:latin typeface="Arial" charset="0"/>
                 <a:ea typeface="ＭＳ Ｐゴシック" charset="0"/>
               </a:rPr>
-              <a:t>1) </a:t>
+              <a:t>(1) </a:t>
             </a:r>
             <a:r>
               <a:rPr lang="en-US" altLang="ja-JP" dirty="0" err="1">
@@ -7941,28 +7620,14 @@
                 <a:latin typeface="Arial" charset="0"/>
                 <a:ea typeface="ＭＳ Ｐゴシック" charset="0"/>
               </a:rPr>
-              <a:t>i</a:t>
-            </a:r>
-            <a:r>
-              <a:rPr lang="en-US" altLang="ja-JP" dirty="0" err="1" smtClean="0">
-                <a:latin typeface="Arial" charset="0"/>
-                <a:ea typeface="ＭＳ Ｐゴシック" charset="0"/>
-              </a:rPr>
-              <a:t>nt</a:t>
-            </a:r>
-            <a:r>
-              <a:rPr lang="en-US" altLang="ja-JP" dirty="0" smtClean="0">
-                <a:latin typeface="Arial" charset="0"/>
-                <a:ea typeface="ＭＳ Ｐゴシック" charset="0"/>
-              </a:rPr>
-              <a:t> </a:t>
+              <a:t>int</a:t>
             </a:r>
             <a:r>
               <a:rPr lang="en-US" altLang="ja-JP" dirty="0">
                 <a:latin typeface="Arial" charset="0"/>
                 <a:ea typeface="ＭＳ Ｐゴシック" charset="0"/>
               </a:rPr>
-              <a:t>b[2][13];</a:t>
+              <a:t> b[2][13];</a:t>
             </a:r>
           </a:p>
           <a:p>
@@ -7990,13 +7655,6 @@
   <p:clrMapOvr>
     <a:masterClrMapping/>
   </p:clrMapOvr>
-  <p:timing>
-    <p:tnLst>
-      <p:par>
-        <p:cTn xmlns:p14="http://schemas.microsoft.com/office/powerpoint/2010/main" id="1" dur="indefinite" restart="never" nodeType="tmRoot"/>
-      </p:par>
-    </p:tnLst>
-  </p:timing>
 </p:sld>
 </file>
 
@@ -8063,19 +7721,19 @@
               <a:defRPr/>
             </a:pPr>
             <a:r>
-              <a:rPr lang="en-US" altLang="ja-JP" dirty="0" smtClean="0">
+              <a:rPr lang="en-US" altLang="ja-JP" dirty="0">
                 <a:cs typeface="+mn-cs"/>
               </a:rPr>
               <a:t>(1) </a:t>
             </a:r>
             <a:r>
-              <a:rPr lang="en-US" altLang="ja-JP" dirty="0" err="1" smtClean="0">
+              <a:rPr lang="en-US" altLang="ja-JP" dirty="0" err="1">
                 <a:cs typeface="+mn-cs"/>
               </a:rPr>
               <a:t>int</a:t>
             </a:r>
             <a:r>
-              <a:rPr lang="en-US" altLang="ja-JP" dirty="0" smtClean="0">
+              <a:rPr lang="en-US" altLang="ja-JP" dirty="0">
                 <a:cs typeface="+mn-cs"/>
               </a:rPr>
               <a:t>  (*a) [13];</a:t>
@@ -8088,19 +7746,19 @@
               <a:defRPr/>
             </a:pPr>
             <a:r>
-              <a:rPr lang="en-US" altLang="ja-JP" dirty="0" smtClean="0">
+              <a:rPr lang="en-US" altLang="ja-JP" dirty="0">
                 <a:cs typeface="+mn-cs"/>
               </a:rPr>
               <a:t>(2) </a:t>
             </a:r>
             <a:r>
-              <a:rPr lang="en-US" altLang="ja-JP" dirty="0" err="1" smtClean="0">
+              <a:rPr lang="en-US" altLang="ja-JP" dirty="0" err="1">
                 <a:cs typeface="+mn-cs"/>
               </a:rPr>
               <a:t>int</a:t>
             </a:r>
             <a:r>
-              <a:rPr lang="en-US" altLang="ja-JP" dirty="0" smtClean="0">
+              <a:rPr lang="en-US" altLang="ja-JP" dirty="0">
                 <a:cs typeface="+mn-cs"/>
               </a:rPr>
               <a:t> b[2][13];</a:t>
@@ -8113,12 +7771,12 @@
               <a:defRPr/>
             </a:pPr>
             <a:r>
-              <a:rPr lang="ja-JP" altLang="en-US" dirty="0" smtClean="0">
+              <a:rPr lang="ja-JP" altLang="en-US" dirty="0">
                 <a:cs typeface="+mn-cs"/>
               </a:rPr>
               <a:t>を後置記法に直すと、</a:t>
             </a:r>
-            <a:endParaRPr lang="en-US" altLang="ja-JP" dirty="0" smtClean="0">
+            <a:endParaRPr lang="en-US" altLang="ja-JP" dirty="0">
               <a:cs typeface="+mn-cs"/>
             </a:endParaRPr>
           </a:p>
@@ -8129,19 +7787,19 @@
               <a:defRPr/>
             </a:pPr>
             <a:r>
-              <a:rPr lang="en-US" altLang="ja-JP" dirty="0" smtClean="0">
+              <a:rPr lang="en-US" altLang="ja-JP" dirty="0">
                 <a:cs typeface="+mn-cs"/>
               </a:rPr>
               <a:t> a :  </a:t>
             </a:r>
             <a:r>
-              <a:rPr lang="en-US" altLang="ja-JP" dirty="0" err="1" smtClean="0">
+              <a:rPr lang="en-US" altLang="ja-JP" dirty="0" err="1">
                 <a:cs typeface="+mn-cs"/>
               </a:rPr>
               <a:t>int</a:t>
             </a:r>
             <a:r>
-              <a:rPr lang="en-US" altLang="ja-JP" dirty="0" smtClean="0">
+              <a:rPr lang="en-US" altLang="ja-JP" dirty="0">
                 <a:cs typeface="+mn-cs"/>
               </a:rPr>
               <a:t> [13]  *</a:t>
@@ -8154,19 +7812,19 @@
               <a:defRPr/>
             </a:pPr>
             <a:r>
-              <a:rPr lang="en-US" altLang="ja-JP" dirty="0" smtClean="0">
+              <a:rPr lang="en-US" altLang="ja-JP" dirty="0">
                 <a:cs typeface="+mn-cs"/>
               </a:rPr>
               <a:t> b : </a:t>
             </a:r>
             <a:r>
-              <a:rPr lang="en-US" altLang="ja-JP" dirty="0" err="1" smtClean="0">
+              <a:rPr lang="en-US" altLang="ja-JP" dirty="0" err="1">
                 <a:cs typeface="+mn-cs"/>
               </a:rPr>
               <a:t>int</a:t>
             </a:r>
             <a:r>
-              <a:rPr lang="en-US" altLang="ja-JP" dirty="0" smtClean="0">
+              <a:rPr lang="en-US" altLang="ja-JP" dirty="0">
                 <a:cs typeface="+mn-cs"/>
               </a:rPr>
               <a:t>  [13] [2]</a:t>
@@ -8179,12 +7837,12 @@
               <a:defRPr/>
             </a:pPr>
             <a:r>
-              <a:rPr lang="ja-JP" altLang="en-US" dirty="0" smtClean="0">
+              <a:rPr lang="ja-JP" altLang="en-US" dirty="0">
                 <a:cs typeface="+mn-cs"/>
               </a:rPr>
               <a:t>となる。</a:t>
             </a:r>
-            <a:endParaRPr lang="en-US" altLang="ja-JP" dirty="0" smtClean="0">
+            <a:endParaRPr lang="en-US" altLang="ja-JP" dirty="0">
               <a:cs typeface="+mn-cs"/>
             </a:endParaRPr>
           </a:p>
@@ -8195,13 +7853,6 @@
   <p:clrMapOvr>
     <a:masterClrMapping/>
   </p:clrMapOvr>
-  <p:timing>
-    <p:tnLst>
-      <p:par>
-        <p:cTn xmlns:p14="http://schemas.microsoft.com/office/powerpoint/2010/main" id="1" dur="indefinite" restart="never" nodeType="tmRoot"/>
-      </p:par>
-    </p:tnLst>
-  </p:timing>
 </p:sld>
 </file>
 
@@ -8242,17 +7893,10 @@
                 <a:latin typeface="Arial" charset="0"/>
                 <a:ea typeface="ＭＳ Ｐゴシック" charset="0"/>
               </a:rPr>
-              <a:t>練習</a:t>
-            </a:r>
-            <a:r>
-              <a:rPr lang="ja-JP" altLang="en-US" dirty="0" smtClean="0">
-                <a:latin typeface="Arial" charset="0"/>
-                <a:ea typeface="ＭＳ Ｐゴシック" charset="0"/>
-              </a:rPr>
-              <a:t>問題</a:t>
-            </a:r>
-            <a:r>
-              <a:rPr lang="en-US" altLang="ja-JP" dirty="0" smtClean="0">
+              <a:t>練習問題</a:t>
+            </a:r>
+            <a:r>
+              <a:rPr lang="en-US" altLang="ja-JP" dirty="0">
                 <a:latin typeface="Arial" charset="0"/>
                 <a:ea typeface="ＭＳ Ｐゴシック" charset="0"/>
               </a:rPr>
@@ -8285,20 +7929,20 @@
               <a:buNone/>
             </a:pPr>
             <a:r>
-              <a:rPr lang="en-US" altLang="ja-JP" dirty="0" smtClean="0">
+              <a:rPr lang="en-US" altLang="ja-JP" dirty="0">
                 <a:latin typeface="Arial" charset="0"/>
                 <a:ea typeface="ＭＳ Ｐゴシック" charset="0"/>
               </a:rPr>
               <a:t>C</a:t>
             </a:r>
             <a:r>
-              <a:rPr lang="ja-JP" altLang="en-US" dirty="0" smtClean="0">
+              <a:rPr lang="ja-JP" altLang="en-US" dirty="0">
                 <a:latin typeface="Arial" charset="0"/>
                 <a:ea typeface="ＭＳ Ｐゴシック" charset="0"/>
               </a:rPr>
               <a:t>言語の変数宣言</a:t>
             </a:r>
-            <a:endParaRPr lang="en-US" altLang="ja-JP" dirty="0" smtClean="0">
+            <a:endParaRPr lang="en-US" altLang="ja-JP" dirty="0">
               <a:latin typeface="Arial" charset="0"/>
               <a:ea typeface="ＭＳ Ｐゴシック" charset="0"/>
             </a:endParaRPr>
@@ -8309,7 +7953,7 @@
               <a:buNone/>
             </a:pPr>
             <a:r>
-              <a:rPr lang="en-US" altLang="ja-JP" dirty="0" smtClean="0">
+              <a:rPr lang="en-US" altLang="ja-JP" dirty="0">
                 <a:latin typeface="Arial" charset="0"/>
                 <a:ea typeface="ＭＳ Ｐゴシック" charset="0"/>
               </a:rPr>
@@ -8336,25 +7980,11 @@
               <a:buNone/>
             </a:pPr>
             <a:r>
-              <a:rPr lang="ja-JP" altLang="en-US" dirty="0" smtClean="0">
-                <a:latin typeface="Arial" charset="0"/>
-                <a:ea typeface="ＭＳ Ｐゴシック" charset="0"/>
-              </a:rPr>
-              <a:t>のもと</a:t>
-            </a:r>
-            <a:r>
               <a:rPr lang="ja-JP" altLang="en-US" dirty="0">
                 <a:latin typeface="Arial" charset="0"/>
                 <a:ea typeface="ＭＳ Ｐゴシック" charset="0"/>
               </a:rPr>
-              <a:t>で</a:t>
-            </a:r>
-            <a:r>
-              <a:rPr lang="ja-JP" altLang="en-US" dirty="0" smtClean="0">
-                <a:latin typeface="Arial" charset="0"/>
-                <a:ea typeface="ＭＳ Ｐゴシック" charset="0"/>
-              </a:rPr>
-              <a:t>、式  </a:t>
+              <a:t>のもとで、式  </a:t>
             </a:r>
             <a:r>
               <a:rPr lang="en-US" altLang="ja-JP" dirty="0">
@@ -8387,13 +8017,6 @@
   <p:clrMapOvr>
     <a:masterClrMapping/>
   </p:clrMapOvr>
-  <p:timing>
-    <p:tnLst>
-      <p:par>
-        <p:cTn xmlns:p14="http://schemas.microsoft.com/office/powerpoint/2010/main" id="1" dur="indefinite" restart="never" nodeType="tmRoot"/>
-      </p:par>
-    </p:tnLst>
-  </p:timing>
 </p:sld>
 </file>
 
@@ -8459,7 +8082,7 @@
               <a:buNone/>
             </a:pPr>
             <a:r>
-              <a:rPr lang="en-US" altLang="ja-JP" dirty="0" smtClean="0">
+              <a:rPr lang="en-US" altLang="ja-JP" dirty="0">
                 <a:latin typeface="Arial" charset="0"/>
                 <a:ea typeface="ＭＳ Ｐゴシック" charset="0"/>
               </a:rPr>
@@ -8507,21 +8130,7 @@
                 <a:latin typeface="Arial" charset="0"/>
                 <a:ea typeface="ＭＳ Ｐゴシック" charset="0"/>
               </a:rPr>
-              <a:t> </a:t>
-            </a:r>
-            <a:r>
-              <a:rPr lang="en-US" altLang="ja-JP" dirty="0" smtClean="0">
-                <a:latin typeface="Arial" charset="0"/>
-                <a:ea typeface="ＭＳ Ｐゴシック" charset="0"/>
-              </a:rPr>
-              <a:t>   a</a:t>
-            </a:r>
-            <a:r>
-              <a:rPr lang="en-US" altLang="ja-JP" dirty="0">
-                <a:latin typeface="Arial" charset="0"/>
-                <a:ea typeface="ＭＳ Ｐゴシック" charset="0"/>
-              </a:rPr>
-              <a:t>: </a:t>
+              <a:t>    a: </a:t>
             </a:r>
             <a:r>
               <a:rPr lang="en-US" altLang="ja-JP" dirty="0" err="1">
@@ -8575,18 +8184,11 @@
               <a:buNone/>
             </a:pPr>
             <a:r>
-              <a:rPr lang="en-US" altLang="ja-JP" dirty="0" smtClean="0">
-                <a:latin typeface="Arial" charset="0"/>
-                <a:ea typeface="ＭＳ Ｐゴシック" charset="0"/>
-              </a:rPr>
-              <a:t>    </a:t>
-            </a:r>
-            <a:r>
               <a:rPr lang="en-US" altLang="ja-JP" dirty="0">
                 <a:latin typeface="Arial" charset="0"/>
                 <a:ea typeface="ＭＳ Ｐゴシック" charset="0"/>
               </a:rPr>
-              <a:t>*a : </a:t>
+              <a:t>    *a : </a:t>
             </a:r>
             <a:r>
               <a:rPr lang="en-US" altLang="ja-JP" dirty="0" err="1">
@@ -8627,13 +8229,6 @@
   <p:clrMapOvr>
     <a:masterClrMapping/>
   </p:clrMapOvr>
-  <p:timing>
-    <p:tnLst>
-      <p:par>
-        <p:cTn xmlns:p14="http://schemas.microsoft.com/office/powerpoint/2010/main" id="1" dur="indefinite" restart="never" nodeType="tmRoot"/>
-      </p:par>
-    </p:tnLst>
-  </p:timing>
 </p:sld>
 </file>
 
